--- a/docs/output/PJ1测试汇报_成果展示风格版.pptx
+++ b/docs/output/PJ1测试汇报_成果展示风格版.pptx
@@ -4824,7 +4824,7 @@
                           </a:solidFill>
                           <a:latin typeface="Microsoft YaHei"/>
                         </a:rPr>
-                        <a:t>代表输入/路径</a:t>
+                        <a:t>代表输入/场景</a:t>
                       </a:r>
                     </a:p>
                   </a:txBody>
@@ -4964,7 +4964,7 @@
                           </a:solidFill>
                           <a:latin typeface="Microsoft YaHei"/>
                         </a:rPr>
-                        <a:t>OC-01~OC-06</a:t>
+                        <a:t>订单相关用例</a:t>
                       </a:r>
                     </a:p>
                   </a:txBody>
@@ -5058,7 +5058,7 @@
                           </a:solidFill>
                           <a:latin typeface="Microsoft YaHei"/>
                         </a:rPr>
-                        <a:t>OC-07~OC-10</a:t>
+                        <a:t>分页与参数用例</a:t>
                       </a:r>
                     </a:p>
                   </a:txBody>
@@ -5106,7 +5106,7 @@
                           </a:solidFill>
                           <a:latin typeface="Microsoft YaHei"/>
                         </a:rPr>
-                        <a:t>add / cancel / select 等 service 方法</a:t>
+                        <a:t>创建、取消、查询等核心业务路径</a:t>
                       </a:r>
                     </a:p>
                   </a:txBody>
@@ -5152,7 +5152,7 @@
                           </a:solidFill>
                           <a:latin typeface="Microsoft YaHei"/>
                         </a:rPr>
-                        <a:t>UT-ORDER-*</a:t>
+                        <a:t>单元测试用例</a:t>
                       </a:r>
                     </a:p>
                   </a:txBody>
@@ -5246,7 +5246,7 @@
                           </a:solidFill>
                           <a:latin typeface="Microsoft YaHei"/>
                         </a:rPr>
-                        <a:t>AOC-* / OC-*</a:t>
+                        <a:t>集成测试用例</a:t>
                       </a:r>
                     </a:p>
                   </a:txBody>
@@ -6817,7 +6817,7 @@
                 </a:solidFill>
                 <a:latin typeface="Consolas"/>
               </a:rPr>
-              <a:t>void cancelOrder_shouldRedirectWhenLoginUserOwnsOrder() {</a:t>
+              <a:t>    void shouldReturnLoggedUserOrdersOnly() throws Exception {</a:t>
             </a:r>
           </a:p>
           <a:p>
@@ -6829,7 +6829,7 @@
                 </a:solidFill>
                 <a:latin typeface="Consolas"/>
               </a:rPr>
-              <a:t>    mockMvc.perform(get("/order/cancel")</a:t>
+              <a:t>        mockMvc.perform(get("/getOrderList.do").session(userSession()).param("page", "1"))</a:t>
             </a:r>
           </a:p>
           <a:p>
@@ -6841,7 +6841,7 @@
                 </a:solidFill>
                 <a:latin typeface="Consolas"/>
               </a:rPr>
-              <a:t>        .param("orderID", "1")</a:t>
+              <a:t>                .andExpect(status().isOk())</a:t>
             </a:r>
           </a:p>
           <a:p>
@@ -6853,7 +6853,7 @@
                 </a:solidFill>
                 <a:latin typeface="Consolas"/>
               </a:rPr>
-              <a:t>        .sessionAttr("user", user))</a:t>
+              <a:t>                .andExpect(jsonPath("$", hasSize(2)))</a:t>
             </a:r>
           </a:p>
           <a:p>
@@ -6865,7 +6865,7 @@
                 </a:solidFill>
                 <a:latin typeface="Consolas"/>
               </a:rPr>
-              <a:t>      .andExpect(status().is3xxRedirection())</a:t>
+              <a:t>                .andExpect(jsonPath("$[0].userID").value(normalUser.getUserID()))</a:t>
             </a:r>
           </a:p>
           <a:p>
@@ -6877,7 +6877,7 @@
                 </a:solidFill>
                 <a:latin typeface="Consolas"/>
               </a:rPr>
-              <a:t>      .andExpect(redirectedUrl("/order/list"));</a:t>
+              <a:t>                .andExpect(jsonPath("$[1].userID").value(normalUser.getUserID()));</a:t>
             </a:r>
           </a:p>
           <a:p>
@@ -6889,7 +6889,7 @@
                 </a:solidFill>
                 <a:latin typeface="Consolas"/>
               </a:rPr>
-              <a:t>}</a:t>
+              <a:t>    }</a:t>
             </a:r>
           </a:p>
         </p:txBody>
@@ -6955,7 +6955,7 @@
                 </a:solidFill>
                 <a:latin typeface="Consolas"/>
               </a:rPr>
-              <a:t>void checkLogin_shouldReturnNullWhenPasswordMismatch() {</a:t>
+              <a:t>    void shouldReturnNewUserCountAfterCreate() {</a:t>
             </a:r>
           </a:p>
           <a:p>
@@ -6967,7 +6967,7 @@
                 </a:solidFill>
                 <a:latin typeface="Consolas"/>
               </a:rPr>
-              <a:t>    when(userDao.getUser("u01")).thenReturn(user);</a:t>
+              <a:t>        User user = TestDataFactory.user(0, "newUser", "pwd", 0, "New User");</a:t>
             </a:r>
           </a:p>
           <a:p>
@@ -6979,8 +6979,11 @@
                 </a:solidFill>
                 <a:latin typeface="Consolas"/>
               </a:rPr>
-              <a:t>    User result = userService.checkLogin("u01", "bad");</a:t>
-            </a:r>
+              <a:t>        when(userDao.findAll()).thenReturn(Arrays.asList(user, TestDataFactory.user(1, "u2", "p2", 0, "U2")));</a:t>
+            </a:r>
+          </a:p>
+          <a:p>
+            <a:pPr algn="l"/>
           </a:p>
           <a:p>
             <a:pPr algn="l"/>
@@ -6991,8 +6994,11 @@
                 </a:solidFill>
                 <a:latin typeface="Consolas"/>
               </a:rPr>
-              <a:t>    assertNull(result);</a:t>
-            </a:r>
+              <a:t>        int createdCount = userService.create(user);</a:t>
+            </a:r>
+          </a:p>
+          <a:p>
+            <a:pPr algn="l"/>
           </a:p>
           <a:p>
             <a:pPr algn="l"/>
@@ -7003,7 +7009,31 @@
                 </a:solidFill>
                 <a:latin typeface="Consolas"/>
               </a:rPr>
-              <a:t>}</a:t>
+              <a:t>        verify(userDao).save(user);</a:t>
+            </a:r>
+          </a:p>
+          <a:p>
+            <a:pPr algn="l"/>
+            <a:r>
+              <a:rPr sz="1000">
+                <a:solidFill>
+                  <a:srgbClr val="283C50"/>
+                </a:solidFill>
+                <a:latin typeface="Consolas"/>
+              </a:rPr>
+              <a:t>        assertThat(createdCount).isEqualTo(2);</a:t>
+            </a:r>
+          </a:p>
+          <a:p>
+            <a:pPr algn="l"/>
+            <a:r>
+              <a:rPr sz="1000">
+                <a:solidFill>
+                  <a:srgbClr val="283C50"/>
+                </a:solidFill>
+                <a:latin typeface="Consolas"/>
+              </a:rPr>
+              <a:t>    }</a:t>
             </a:r>
           </a:p>
         </p:txBody>
@@ -7038,7 +7068,7 @@
                 </a:solidFill>
                 <a:latin typeface="Microsoft YaHei"/>
               </a:rPr>
-              <a:t>左侧：controller 集成测试路径校验</a:t>
+              <a:t>左侧：真实集成测试脚本片段</a:t>
             </a:r>
           </a:p>
           <a:p>
@@ -7050,7 +7080,7 @@
                 </a:solidFill>
                 <a:latin typeface="Microsoft YaHei"/>
               </a:rPr>
-              <a:t>右侧：service 单元测试分支校验</a:t>
+              <a:t>右侧：真实单元测试脚本片段</a:t>
             </a:r>
           </a:p>
         </p:txBody>
@@ -7416,8 +7446,8 @@
         </p:nvSpPr>
         <p:spPr>
           <a:xfrm>
-            <a:off x="411480" y="457200"/>
-            <a:ext cx="1097280" cy="4663440"/>
+            <a:off x="228600" y="530352"/>
+            <a:ext cx="502920" cy="4709160"/>
           </a:xfrm>
           <a:prstGeom prst="rect">
             <a:avLst/>
@@ -7425,68 +7455,137 @@
           <a:noFill/>
         </p:spPr>
         <p:txBody>
-          <a:bodyPr wrap="none">
-            <a:normAutofit/>
+          <a:bodyPr wrap="none" lIns="0" rIns="0" tIns="0" bIns="0">
+            <a:spAutoFit/>
           </a:bodyPr>
           <a:lstStyle/>
           <a:p>
-            <a:r>
-              <a:rPr sz="2300" b="1">
+            <a:pPr algn="ctr">
+              <a:lnSpc>
+                <a:spcPct val="85000"/>
+              </a:lnSpc>
+              <a:spcAft>
+                <a:spcPts val="0"/>
+              </a:spcAft>
+            </a:pPr>
+            <a:r>
+              <a:rPr sz="2200" b="1">
                 <a:solidFill>
                   <a:srgbClr val="000000"/>
                 </a:solidFill>
                 <a:latin typeface="Microsoft YaHei"/>
               </a:rPr>
-              <a:t>service 层单元测试模块</a:t>
-            </a:r>
-          </a:p>
-        </p:txBody>
-      </p:sp>
-      <p:sp>
-        <p:nvSpPr>
-          <p:cNvPr id="11" name="TextBox 10"/>
-          <p:cNvSpPr txBox="1"/>
-          <p:nvPr/>
-        </p:nvSpPr>
-        <p:spPr>
-          <a:xfrm>
-            <a:off x="1508760" y="548640"/>
-            <a:ext cx="6949440" cy="320040"/>
-          </a:xfrm>
-          <a:prstGeom prst="rect">
-            <a:avLst/>
-          </a:prstGeom>
-          <a:noFill/>
-        </p:spPr>
-        <p:txBody>
-          <a:bodyPr wrap="none">
-            <a:normAutofit/>
-          </a:bodyPr>
-          <a:lstStyle/>
-          <a:p>
-            <a:r>
-              <a:rPr sz="1500" b="0">
+              <a:t>单</a:t>
+            </a:r>
+          </a:p>
+          <a:p>
+            <a:pPr algn="ctr">
+              <a:lnSpc>
+                <a:spcPct val="85000"/>
+              </a:lnSpc>
+              <a:spcAft>
+                <a:spcPts val="0"/>
+              </a:spcAft>
+            </a:pPr>
+            <a:r>
+              <a:rPr sz="2200" b="1">
                 <a:solidFill>
                   <a:srgbClr val="000000"/>
                 </a:solidFill>
                 <a:latin typeface="Microsoft YaHei"/>
               </a:rPr>
-              <a:t>（com.demo.service.impl.*）</a:t>
+              <a:t>元</a:t>
+            </a:r>
+          </a:p>
+          <a:p>
+            <a:pPr algn="ctr">
+              <a:lnSpc>
+                <a:spcPct val="85000"/>
+              </a:lnSpc>
+              <a:spcAft>
+                <a:spcPts val="0"/>
+              </a:spcAft>
+            </a:pPr>
+            <a:r>
+              <a:rPr sz="2200" b="1">
+                <a:solidFill>
+                  <a:srgbClr val="000000"/>
+                </a:solidFill>
+                <a:latin typeface="Microsoft YaHei"/>
+              </a:rPr>
+              <a:t>测</a:t>
+            </a:r>
+          </a:p>
+          <a:p>
+            <a:pPr algn="ctr">
+              <a:lnSpc>
+                <a:spcPct val="85000"/>
+              </a:lnSpc>
+              <a:spcAft>
+                <a:spcPts val="0"/>
+              </a:spcAft>
+            </a:pPr>
+            <a:r>
+              <a:rPr sz="2200" b="1">
+                <a:solidFill>
+                  <a:srgbClr val="000000"/>
+                </a:solidFill>
+                <a:latin typeface="Microsoft YaHei"/>
+              </a:rPr>
+              <a:t>试</a:t>
+            </a:r>
+          </a:p>
+          <a:p>
+            <a:pPr algn="ctr">
+              <a:lnSpc>
+                <a:spcPct val="85000"/>
+              </a:lnSpc>
+              <a:spcAft>
+                <a:spcPts val="0"/>
+              </a:spcAft>
+            </a:pPr>
+            <a:r>
+              <a:rPr sz="2200" b="1">
+                <a:solidFill>
+                  <a:srgbClr val="000000"/>
+                </a:solidFill>
+                <a:latin typeface="Microsoft YaHei"/>
+              </a:rPr>
+              <a:t>模</a:t>
+            </a:r>
+          </a:p>
+          <a:p>
+            <a:pPr algn="ctr">
+              <a:lnSpc>
+                <a:spcPct val="85000"/>
+              </a:lnSpc>
+              <a:spcAft>
+                <a:spcPts val="0"/>
+              </a:spcAft>
+            </a:pPr>
+            <a:r>
+              <a:rPr sz="2200" b="1">
+                <a:solidFill>
+                  <a:srgbClr val="000000"/>
+                </a:solidFill>
+                <a:latin typeface="Microsoft YaHei"/>
+              </a:rPr>
+              <a:t>块</a:t>
             </a:r>
           </a:p>
         </p:txBody>
       </p:sp>
       <p:graphicFrame>
         <p:nvGraphicFramePr>
-          <p:cNvPr id="12" name="Table 11"/>
+          <p:cNvPr id="11" name="Table 10"/>
           <p:cNvGraphicFramePr>
             <a:graphicFrameLocks noGrp="1"/>
           </p:cNvGraphicFramePr>
           <p:nvPr/>
         </p:nvGraphicFramePr>
         <p:xfrm>
-          <a:off x="1417320" y="1143000"/>
-          <a:ext cx="10149840" cy="4572000"/>
+          <a:off x="960120" y="896112"/>
+          <a:ext cx="10652760" cy="5166360"/>
         </p:xfrm>
         <a:graphic>
           <a:graphicData uri="http://schemas.openxmlformats.org/drawingml/2006/table">
@@ -7495,21 +7594,20 @@
                 <a:tableStyleId>{5C22544A-7EE6-4342-B048-85BDC9FD1C3A}</a:tableStyleId>
               </a:tblPr>
               <a:tblGrid>
-                <a:gridCol w="2029968"/>
-                <a:gridCol w="2029968"/>
-                <a:gridCol w="2029968"/>
-                <a:gridCol w="2029968"/>
-                <a:gridCol w="2029968"/>
+                <a:gridCol w="2663190"/>
+                <a:gridCol w="2663190"/>
+                <a:gridCol w="2663190"/>
+                <a:gridCol w="2663190"/>
               </a:tblGrid>
-              <a:tr h="653142">
-                <a:tc>
-                  <a:txBody>
-                    <a:bodyPr/>
-                    <a:lstStyle/>
-                    <a:p>
-                      <a:pPr algn="ctr"/>
-                      <a:r>
-                        <a:rPr sz="1100" b="1">
+              <a:tr h="738051">
+                <a:tc>
+                  <a:txBody>
+                    <a:bodyPr/>
+                    <a:lstStyle/>
+                    <a:p>
+                      <a:pPr algn="ctr"/>
+                      <a:r>
+                        <a:rPr sz="1300" b="1">
                           <a:solidFill>
                             <a:srgbClr val="FFFFFF"/>
                           </a:solidFill>
@@ -7532,13 +7630,13 @@
                     <a:p>
                       <a:pPr algn="ctr"/>
                       <a:r>
-                        <a:rPr sz="1100" b="1">
+                        <a:rPr sz="1300" b="1">
                           <a:solidFill>
                             <a:srgbClr val="FFFFFF"/>
                           </a:solidFill>
                           <a:latin typeface="Microsoft YaHei"/>
                         </a:rPr>
-                        <a:t>测试对象</a:t>
+                        <a:t>测试模块</a:t>
                       </a:r>
                     </a:p>
                   </a:txBody>
@@ -7555,13 +7653,13 @@
                     <a:p>
                       <a:pPr algn="ctr"/>
                       <a:r>
-                        <a:rPr sz="1100" b="1">
+                        <a:rPr sz="1300" b="1">
                           <a:solidFill>
                             <a:srgbClr val="FFFFFF"/>
                           </a:solidFill>
                           <a:latin typeface="Microsoft YaHei"/>
                         </a:rPr>
-                        <a:t>用例编号</a:t>
+                        <a:t>用例数量</a:t>
                       </a:r>
                     </a:p>
                   </a:txBody>
@@ -7578,13 +7676,13 @@
                     <a:p>
                       <a:pPr algn="ctr"/>
                       <a:r>
-                        <a:rPr sz="1100" b="1">
+                        <a:rPr sz="1300" b="1">
                           <a:solidFill>
                             <a:srgbClr val="FFFFFF"/>
                           </a:solidFill>
                           <a:latin typeface="Microsoft YaHei"/>
                         </a:rPr>
-                        <a:t>数量</a:t>
+                        <a:t>覆盖重点</a:t>
                       </a:r>
                     </a:p>
                   </a:txBody>
@@ -7594,39 +7692,16 @@
                     </a:solidFill>
                   </a:tcPr>
                 </a:tc>
-                <a:tc>
-                  <a:txBody>
-                    <a:bodyPr/>
-                    <a:lstStyle/>
-                    <a:p>
-                      <a:pPr algn="ctr"/>
-                      <a:r>
-                        <a:rPr sz="1100" b="1">
-                          <a:solidFill>
-                            <a:srgbClr val="FFFFFF"/>
-                          </a:solidFill>
-                          <a:latin typeface="Microsoft YaHei"/>
-                        </a:rPr>
-                        <a:t>重点</a:t>
-                      </a:r>
-                    </a:p>
-                  </a:txBody>
-                  <a:tcPr>
-                    <a:solidFill>
-                      <a:srgbClr val="109D71"/>
-                    </a:solidFill>
-                  </a:tcPr>
-                </a:tc>
               </a:tr>
-              <a:tr h="653142">
-                <a:tc>
-                  <a:txBody>
-                    <a:bodyPr/>
-                    <a:lstStyle/>
-                    <a:p>
-                      <a:pPr algn="ctr"/>
-                      <a:r>
-                        <a:rPr sz="1000" b="0">
+              <a:tr h="738051">
+                <a:tc>
+                  <a:txBody>
+                    <a:bodyPr/>
+                    <a:lstStyle/>
+                    <a:p>
+                      <a:pPr algn="ctr"/>
+                      <a:r>
+                        <a:rPr sz="1200" b="0">
                           <a:solidFill>
                             <a:srgbClr val="000000"/>
                           </a:solidFill>
@@ -7649,13 +7724,13 @@
                     <a:p>
                       <a:pPr algn="ctr"/>
                       <a:r>
-                        <a:rPr sz="1000" b="0">
-                          <a:solidFill>
-                            <a:srgbClr val="000000"/>
-                          </a:solidFill>
-                          <a:latin typeface="Microsoft YaHei"/>
-                        </a:rPr>
-                        <a:t>UserServiceImpl</a:t>
+                        <a:rPr sz="1200" b="0">
+                          <a:solidFill>
+                            <a:srgbClr val="000000"/>
+                          </a:solidFill>
+                          <a:latin typeface="Microsoft YaHei"/>
+                        </a:rPr>
+                        <a:t>用户服务</a:t>
                       </a:r>
                     </a:p>
                   </a:txBody>
@@ -7672,13 +7747,13 @@
                     <a:p>
                       <a:pPr algn="ctr"/>
                       <a:r>
-                        <a:rPr sz="1000" b="0">
-                          <a:solidFill>
-                            <a:srgbClr val="000000"/>
-                          </a:solidFill>
-                          <a:latin typeface="Microsoft YaHei"/>
-                        </a:rPr>
-                        <a:t>UT-USER-001~008</a:t>
+                        <a:rPr sz="1200" b="0">
+                          <a:solidFill>
+                            <a:srgbClr val="000000"/>
+                          </a:solidFill>
+                          <a:latin typeface="Microsoft YaHei"/>
+                        </a:rPr>
+                        <a:t>8</a:t>
                       </a:r>
                     </a:p>
                   </a:txBody>
@@ -7695,7 +7770,78 @@
                     <a:p>
                       <a:pPr algn="ctr"/>
                       <a:r>
-                        <a:rPr sz="1000" b="0">
+                        <a:rPr sz="1200" b="0">
+                          <a:solidFill>
+                            <a:srgbClr val="000000"/>
+                          </a:solidFill>
+                          <a:latin typeface="Microsoft YaHei"/>
+                        </a:rPr>
+                        <a:t>登录、注册、增删改查</a:t>
+                      </a:r>
+                    </a:p>
+                  </a:txBody>
+                  <a:tcPr>
+                    <a:solidFill>
+                      <a:srgbClr val="DAECE2"/>
+                    </a:solidFill>
+                  </a:tcPr>
+                </a:tc>
+              </a:tr>
+              <a:tr h="738051">
+                <a:tc>
+                  <a:txBody>
+                    <a:bodyPr/>
+                    <a:lstStyle/>
+                    <a:p>
+                      <a:pPr algn="ctr"/>
+                      <a:r>
+                        <a:rPr sz="1200" b="0">
+                          <a:solidFill>
+                            <a:srgbClr val="000000"/>
+                          </a:solidFill>
+                          <a:latin typeface="Microsoft YaHei"/>
+                        </a:rPr>
+                        <a:t>2</a:t>
+                      </a:r>
+                    </a:p>
+                  </a:txBody>
+                  <a:tcPr>
+                    <a:solidFill>
+                      <a:srgbClr val="F1F7EC"/>
+                    </a:solidFill>
+                  </a:tcPr>
+                </a:tc>
+                <a:tc>
+                  <a:txBody>
+                    <a:bodyPr/>
+                    <a:lstStyle/>
+                    <a:p>
+                      <a:pPr algn="ctr"/>
+                      <a:r>
+                        <a:rPr sz="1200" b="0">
+                          <a:solidFill>
+                            <a:srgbClr val="000000"/>
+                          </a:solidFill>
+                          <a:latin typeface="Microsoft YaHei"/>
+                        </a:rPr>
+                        <a:t>场馆服务</a:t>
+                      </a:r>
+                    </a:p>
+                  </a:txBody>
+                  <a:tcPr>
+                    <a:solidFill>
+                      <a:srgbClr val="F1F7EC"/>
+                    </a:solidFill>
+                  </a:tcPr>
+                </a:tc>
+                <a:tc>
+                  <a:txBody>
+                    <a:bodyPr/>
+                    <a:lstStyle/>
+                    <a:p>
+                      <a:pPr algn="ctr"/>
+                      <a:r>
+                        <a:rPr sz="1200" b="0">
                           <a:solidFill>
                             <a:srgbClr val="000000"/>
                           </a:solidFill>
@@ -7707,6 +7853,54 @@
                   </a:txBody>
                   <a:tcPr>
                     <a:solidFill>
+                      <a:srgbClr val="F1F7EC"/>
+                    </a:solidFill>
+                  </a:tcPr>
+                </a:tc>
+                <a:tc>
+                  <a:txBody>
+                    <a:bodyPr/>
+                    <a:lstStyle/>
+                    <a:p>
+                      <a:pPr algn="ctr"/>
+                      <a:r>
+                        <a:rPr sz="1200" b="0">
+                          <a:solidFill>
+                            <a:srgbClr val="000000"/>
+                          </a:solidFill>
+                          <a:latin typeface="Microsoft YaHei"/>
+                        </a:rPr>
+                        <a:t>场馆查询、更新、删除</a:t>
+                      </a:r>
+                    </a:p>
+                  </a:txBody>
+                  <a:tcPr>
+                    <a:solidFill>
+                      <a:srgbClr val="F1F7EC"/>
+                    </a:solidFill>
+                  </a:tcPr>
+                </a:tc>
+              </a:tr>
+              <a:tr h="738051">
+                <a:tc>
+                  <a:txBody>
+                    <a:bodyPr/>
+                    <a:lstStyle/>
+                    <a:p>
+                      <a:pPr algn="ctr"/>
+                      <a:r>
+                        <a:rPr sz="1200" b="0">
+                          <a:solidFill>
+                            <a:srgbClr val="000000"/>
+                          </a:solidFill>
+                          <a:latin typeface="Microsoft YaHei"/>
+                        </a:rPr>
+                        <a:t>3</a:t>
+                      </a:r>
+                    </a:p>
+                  </a:txBody>
+                  <a:tcPr>
+                    <a:solidFill>
                       <a:srgbClr val="DAECE2"/>
                     </a:solidFill>
                   </a:tcPr>
@@ -7718,13 +7912,13 @@
                     <a:p>
                       <a:pPr algn="ctr"/>
                       <a:r>
-                        <a:rPr sz="1000" b="0">
-                          <a:solidFill>
-                            <a:srgbClr val="000000"/>
-                          </a:solidFill>
-                          <a:latin typeface="Microsoft YaHei"/>
-                        </a:rPr>
-                        <a:t>登录、注册、增删改查</a:t>
+                        <a:rPr sz="1200" b="0">
+                          <a:solidFill>
+                            <a:srgbClr val="000000"/>
+                          </a:solidFill>
+                          <a:latin typeface="Microsoft YaHei"/>
+                        </a:rPr>
+                        <a:t>订单服务</a:t>
                       </a:r>
                     </a:p>
                   </a:txBody>
@@ -7734,22 +7928,68 @@
                     </a:solidFill>
                   </a:tcPr>
                 </a:tc>
+                <a:tc>
+                  <a:txBody>
+                    <a:bodyPr/>
+                    <a:lstStyle/>
+                    <a:p>
+                      <a:pPr algn="ctr"/>
+                      <a:r>
+                        <a:rPr sz="1200" b="0">
+                          <a:solidFill>
+                            <a:srgbClr val="000000"/>
+                          </a:solidFill>
+                          <a:latin typeface="Microsoft YaHei"/>
+                        </a:rPr>
+                        <a:t>14</a:t>
+                      </a:r>
+                    </a:p>
+                  </a:txBody>
+                  <a:tcPr>
+                    <a:solidFill>
+                      <a:srgbClr val="DAECE2"/>
+                    </a:solidFill>
+                  </a:tcPr>
+                </a:tc>
+                <a:tc>
+                  <a:txBody>
+                    <a:bodyPr/>
+                    <a:lstStyle/>
+                    <a:p>
+                      <a:pPr algn="ctr"/>
+                      <a:r>
+                        <a:rPr sz="1200" b="0">
+                          <a:solidFill>
+                            <a:srgbClr val="000000"/>
+                          </a:solidFill>
+                          <a:latin typeface="Microsoft YaHei"/>
+                        </a:rPr>
+                        <a:t>订单创建、取消、审核状态</a:t>
+                      </a:r>
+                    </a:p>
+                  </a:txBody>
+                  <a:tcPr>
+                    <a:solidFill>
+                      <a:srgbClr val="DAECE2"/>
+                    </a:solidFill>
+                  </a:tcPr>
+                </a:tc>
               </a:tr>
-              <a:tr h="653142">
-                <a:tc>
-                  <a:txBody>
-                    <a:bodyPr/>
-                    <a:lstStyle/>
-                    <a:p>
-                      <a:pPr algn="ctr"/>
-                      <a:r>
-                        <a:rPr sz="1000" b="0">
-                          <a:solidFill>
-                            <a:srgbClr val="000000"/>
-                          </a:solidFill>
-                          <a:latin typeface="Microsoft YaHei"/>
-                        </a:rPr>
-                        <a:t>2</a:t>
+              <a:tr h="738051">
+                <a:tc>
+                  <a:txBody>
+                    <a:bodyPr/>
+                    <a:lstStyle/>
+                    <a:p>
+                      <a:pPr algn="ctr"/>
+                      <a:r>
+                        <a:rPr sz="1200" b="0">
+                          <a:solidFill>
+                            <a:srgbClr val="000000"/>
+                          </a:solidFill>
+                          <a:latin typeface="Microsoft YaHei"/>
+                        </a:rPr>
+                        <a:t>4</a:t>
                       </a:r>
                     </a:p>
                   </a:txBody>
@@ -7766,13 +8006,13 @@
                     <a:p>
                       <a:pPr algn="ctr"/>
                       <a:r>
-                        <a:rPr sz="1000" b="0">
-                          <a:solidFill>
-                            <a:srgbClr val="000000"/>
-                          </a:solidFill>
-                          <a:latin typeface="Microsoft YaHei"/>
-                        </a:rPr>
-                        <a:t>VenueServiceImpl</a:t>
+                        <a:rPr sz="1200" b="0">
+                          <a:solidFill>
+                            <a:srgbClr val="000000"/>
+                          </a:solidFill>
+                          <a:latin typeface="Microsoft YaHei"/>
+                        </a:rPr>
+                        <a:t>留言服务</a:t>
                       </a:r>
                     </a:p>
                   </a:txBody>
@@ -7789,13 +8029,13 @@
                     <a:p>
                       <a:pPr algn="ctr"/>
                       <a:r>
-                        <a:rPr sz="1000" b="0">
-                          <a:solidFill>
-                            <a:srgbClr val="000000"/>
-                          </a:solidFill>
-                          <a:latin typeface="Microsoft YaHei"/>
-                        </a:rPr>
-                        <a:t>UT-VENUE-001~008</a:t>
+                        <a:rPr sz="1200" b="0">
+                          <a:solidFill>
+                            <a:srgbClr val="000000"/>
+                          </a:solidFill>
+                          <a:latin typeface="Microsoft YaHei"/>
+                        </a:rPr>
+                        <a:t>11</a:t>
                       </a:r>
                     </a:p>
                   </a:txBody>
@@ -7812,13 +8052,13 @@
                     <a:p>
                       <a:pPr algn="ctr"/>
                       <a:r>
-                        <a:rPr sz="1000" b="0">
-                          <a:solidFill>
-                            <a:srgbClr val="000000"/>
-                          </a:solidFill>
-                          <a:latin typeface="Microsoft YaHei"/>
-                        </a:rPr>
-                        <a:t>8</a:t>
+                        <a:rPr sz="1200" b="0">
+                          <a:solidFill>
+                            <a:srgbClr val="000000"/>
+                          </a:solidFill>
+                          <a:latin typeface="Microsoft YaHei"/>
+                        </a:rPr>
+                        <a:t>留言发布、审核、删除</a:t>
                       </a:r>
                     </a:p>
                   </a:txBody>
@@ -7828,20 +8068,116 @@
                     </a:solidFill>
                   </a:tcPr>
                 </a:tc>
-                <a:tc>
-                  <a:txBody>
-                    <a:bodyPr/>
-                    <a:lstStyle/>
-                    <a:p>
-                      <a:pPr algn="ctr"/>
-                      <a:r>
-                        <a:rPr sz="1000" b="0">
-                          <a:solidFill>
-                            <a:srgbClr val="000000"/>
-                          </a:solidFill>
-                          <a:latin typeface="Microsoft YaHei"/>
-                        </a:rPr>
-                        <a:t>场馆查询、更新、删除</a:t>
+              </a:tr>
+              <a:tr h="738051">
+                <a:tc>
+                  <a:txBody>
+                    <a:bodyPr/>
+                    <a:lstStyle/>
+                    <a:p>
+                      <a:pPr algn="ctr"/>
+                      <a:r>
+                        <a:rPr sz="1200" b="0">
+                          <a:solidFill>
+                            <a:srgbClr val="000000"/>
+                          </a:solidFill>
+                          <a:latin typeface="Microsoft YaHei"/>
+                        </a:rPr>
+                        <a:t>5</a:t>
+                      </a:r>
+                    </a:p>
+                  </a:txBody>
+                  <a:tcPr>
+                    <a:solidFill>
+                      <a:srgbClr val="DAECE2"/>
+                    </a:solidFill>
+                  </a:tcPr>
+                </a:tc>
+                <a:tc>
+                  <a:txBody>
+                    <a:bodyPr/>
+                    <a:lstStyle/>
+                    <a:p>
+                      <a:pPr algn="ctr"/>
+                      <a:r>
+                        <a:rPr sz="1200" b="0">
+                          <a:solidFill>
+                            <a:srgbClr val="000000"/>
+                          </a:solidFill>
+                          <a:latin typeface="Microsoft YaHei"/>
+                        </a:rPr>
+                        <a:t>新闻服务</a:t>
+                      </a:r>
+                    </a:p>
+                  </a:txBody>
+                  <a:tcPr>
+                    <a:solidFill>
+                      <a:srgbClr val="DAECE2"/>
+                    </a:solidFill>
+                  </a:tcPr>
+                </a:tc>
+                <a:tc>
+                  <a:txBody>
+                    <a:bodyPr/>
+                    <a:lstStyle/>
+                    <a:p>
+                      <a:pPr algn="ctr"/>
+                      <a:r>
+                        <a:rPr sz="1200" b="0">
+                          <a:solidFill>
+                            <a:srgbClr val="000000"/>
+                          </a:solidFill>
+                          <a:latin typeface="Microsoft YaHei"/>
+                        </a:rPr>
+                        <a:t>5</a:t>
+                      </a:r>
+                    </a:p>
+                  </a:txBody>
+                  <a:tcPr>
+                    <a:solidFill>
+                      <a:srgbClr val="DAECE2"/>
+                    </a:solidFill>
+                  </a:tcPr>
+                </a:tc>
+                <a:tc>
+                  <a:txBody>
+                    <a:bodyPr/>
+                    <a:lstStyle/>
+                    <a:p>
+                      <a:pPr algn="ctr"/>
+                      <a:r>
+                        <a:rPr sz="1200" b="0">
+                          <a:solidFill>
+                            <a:srgbClr val="000000"/>
+                          </a:solidFill>
+                          <a:latin typeface="Microsoft YaHei"/>
+                        </a:rPr>
+                        <a:t>新闻列表、详情、维护</a:t>
+                      </a:r>
+                    </a:p>
+                  </a:txBody>
+                  <a:tcPr>
+                    <a:solidFill>
+                      <a:srgbClr val="DAECE2"/>
+                    </a:solidFill>
+                  </a:tcPr>
+                </a:tc>
+              </a:tr>
+              <a:tr h="738054">
+                <a:tc>
+                  <a:txBody>
+                    <a:bodyPr/>
+                    <a:lstStyle/>
+                    <a:p>
+                      <a:pPr algn="ctr"/>
+                      <a:r>
+                        <a:rPr sz="1200" b="0">
+                          <a:solidFill>
+                            <a:srgbClr val="000000"/>
+                          </a:solidFill>
+                          <a:latin typeface="Microsoft YaHei"/>
+                        </a:rPr>
+                        <a:t>6</a:t>
                       </a:r>
                     </a:p>
                   </a:txBody>
@@ -7851,133 +8187,37 @@
                     </a:solidFill>
                   </a:tcPr>
                 </a:tc>
-              </a:tr>
-              <a:tr h="653142">
-                <a:tc>
-                  <a:txBody>
-                    <a:bodyPr/>
-                    <a:lstStyle/>
-                    <a:p>
-                      <a:pPr algn="ctr"/>
-                      <a:r>
-                        <a:rPr sz="1000" b="0">
-                          <a:solidFill>
-                            <a:srgbClr val="000000"/>
-                          </a:solidFill>
-                          <a:latin typeface="Microsoft YaHei"/>
-                        </a:rPr>
-                        <a:t>3</a:t>
-                      </a:r>
-                    </a:p>
-                  </a:txBody>
-                  <a:tcPr>
-                    <a:solidFill>
-                      <a:srgbClr val="DAECE2"/>
-                    </a:solidFill>
-                  </a:tcPr>
-                </a:tc>
-                <a:tc>
-                  <a:txBody>
-                    <a:bodyPr/>
-                    <a:lstStyle/>
-                    <a:p>
-                      <a:pPr algn="ctr"/>
-                      <a:r>
-                        <a:rPr sz="1000" b="0">
-                          <a:solidFill>
-                            <a:srgbClr val="000000"/>
-                          </a:solidFill>
-                          <a:latin typeface="Microsoft YaHei"/>
-                        </a:rPr>
-                        <a:t>OrderServiceImpl</a:t>
-                      </a:r>
-                    </a:p>
-                  </a:txBody>
-                  <a:tcPr>
-                    <a:solidFill>
-                      <a:srgbClr val="DAECE2"/>
-                    </a:solidFill>
-                  </a:tcPr>
-                </a:tc>
-                <a:tc>
-                  <a:txBody>
-                    <a:bodyPr/>
-                    <a:lstStyle/>
-                    <a:p>
-                      <a:pPr algn="ctr"/>
-                      <a:r>
-                        <a:rPr sz="1000" b="0">
-                          <a:solidFill>
-                            <a:srgbClr val="000000"/>
-                          </a:solidFill>
-                          <a:latin typeface="Microsoft YaHei"/>
-                        </a:rPr>
-                        <a:t>UT-ORDER-001~014</a:t>
-                      </a:r>
-                    </a:p>
-                  </a:txBody>
-                  <a:tcPr>
-                    <a:solidFill>
-                      <a:srgbClr val="DAECE2"/>
-                    </a:solidFill>
-                  </a:tcPr>
-                </a:tc>
-                <a:tc>
-                  <a:txBody>
-                    <a:bodyPr/>
-                    <a:lstStyle/>
-                    <a:p>
-                      <a:pPr algn="ctr"/>
-                      <a:r>
-                        <a:rPr sz="1000" b="0">
-                          <a:solidFill>
-                            <a:srgbClr val="000000"/>
-                          </a:solidFill>
-                          <a:latin typeface="Microsoft YaHei"/>
-                        </a:rPr>
-                        <a:t>14</a:t>
-                      </a:r>
-                    </a:p>
-                  </a:txBody>
-                  <a:tcPr>
-                    <a:solidFill>
-                      <a:srgbClr val="DAECE2"/>
-                    </a:solidFill>
-                  </a:tcPr>
-                </a:tc>
-                <a:tc>
-                  <a:txBody>
-                    <a:bodyPr/>
-                    <a:lstStyle/>
-                    <a:p>
-                      <a:pPr algn="ctr"/>
-                      <a:r>
-                        <a:rPr sz="1000" b="0">
-                          <a:solidFill>
-                            <a:srgbClr val="000000"/>
-                          </a:solidFill>
-                          <a:latin typeface="Microsoft YaHei"/>
-                        </a:rPr>
-                        <a:t>订单创建、取消、审核状态</a:t>
-                      </a:r>
-                    </a:p>
-                  </a:txBody>
-                  <a:tcPr>
-                    <a:solidFill>
-                      <a:srgbClr val="DAECE2"/>
-                    </a:solidFill>
-                  </a:tcPr>
-                </a:tc>
-              </a:tr>
-              <a:tr h="653142">
-                <a:tc>
-                  <a:txBody>
-                    <a:bodyPr/>
-                    <a:lstStyle/>
-                    <a:p>
-                      <a:pPr algn="ctr"/>
-                      <a:r>
-                        <a:rPr sz="1000" b="0">
+                <a:tc>
+                  <a:txBody>
+                    <a:bodyPr/>
+                    <a:lstStyle/>
+                    <a:p>
+                      <a:pPr algn="ctr"/>
+                      <a:r>
+                        <a:rPr sz="1200" b="0">
+                          <a:solidFill>
+                            <a:srgbClr val="000000"/>
+                          </a:solidFill>
+                          <a:latin typeface="Microsoft YaHei"/>
+                        </a:rPr>
+                        <a:t>聚合查询服务</a:t>
+                      </a:r>
+                    </a:p>
+                  </a:txBody>
+                  <a:tcPr>
+                    <a:solidFill>
+                      <a:srgbClr val="F1F7EC"/>
+                    </a:solidFill>
+                  </a:tcPr>
+                </a:tc>
+                <a:tc>
+                  <a:txBody>
+                    <a:bodyPr/>
+                    <a:lstStyle/>
+                    <a:p>
+                      <a:pPr algn="ctr"/>
+                      <a:r>
+                        <a:rPr sz="1200" b="0">
                           <a:solidFill>
                             <a:srgbClr val="000000"/>
                           </a:solidFill>
@@ -8000,316 +8240,13 @@
                     <a:p>
                       <a:pPr algn="ctr"/>
                       <a:r>
-                        <a:rPr sz="1000" b="0">
-                          <a:solidFill>
-                            <a:srgbClr val="000000"/>
-                          </a:solidFill>
-                          <a:latin typeface="Microsoft YaHei"/>
-                        </a:rPr>
-                        <a:t>MessageServiceImpl</a:t>
-                      </a:r>
-                    </a:p>
-                  </a:txBody>
-                  <a:tcPr>
-                    <a:solidFill>
-                      <a:srgbClr val="F1F7EC"/>
-                    </a:solidFill>
-                  </a:tcPr>
-                </a:tc>
-                <a:tc>
-                  <a:txBody>
-                    <a:bodyPr/>
-                    <a:lstStyle/>
-                    <a:p>
-                      <a:pPr algn="ctr"/>
-                      <a:r>
-                        <a:rPr sz="1000" b="0">
-                          <a:solidFill>
-                            <a:srgbClr val="000000"/>
-                          </a:solidFill>
-                          <a:latin typeface="Microsoft YaHei"/>
-                        </a:rPr>
-                        <a:t>UT-MSG-001~011</a:t>
-                      </a:r>
-                    </a:p>
-                  </a:txBody>
-                  <a:tcPr>
-                    <a:solidFill>
-                      <a:srgbClr val="F1F7EC"/>
-                    </a:solidFill>
-                  </a:tcPr>
-                </a:tc>
-                <a:tc>
-                  <a:txBody>
-                    <a:bodyPr/>
-                    <a:lstStyle/>
-                    <a:p>
-                      <a:pPr algn="ctr"/>
-                      <a:r>
-                        <a:rPr sz="1000" b="0">
-                          <a:solidFill>
-                            <a:srgbClr val="000000"/>
-                          </a:solidFill>
-                          <a:latin typeface="Microsoft YaHei"/>
-                        </a:rPr>
-                        <a:t>11</a:t>
-                      </a:r>
-                    </a:p>
-                  </a:txBody>
-                  <a:tcPr>
-                    <a:solidFill>
-                      <a:srgbClr val="F1F7EC"/>
-                    </a:solidFill>
-                  </a:tcPr>
-                </a:tc>
-                <a:tc>
-                  <a:txBody>
-                    <a:bodyPr/>
-                    <a:lstStyle/>
-                    <a:p>
-                      <a:pPr algn="ctr"/>
-                      <a:r>
-                        <a:rPr sz="1000" b="0">
-                          <a:solidFill>
-                            <a:srgbClr val="000000"/>
-                          </a:solidFill>
-                          <a:latin typeface="Microsoft YaHei"/>
-                        </a:rPr>
-                        <a:t>留言发布、审核、删除</a:t>
-                      </a:r>
-                    </a:p>
-                  </a:txBody>
-                  <a:tcPr>
-                    <a:solidFill>
-                      <a:srgbClr val="F1F7EC"/>
-                    </a:solidFill>
-                  </a:tcPr>
-                </a:tc>
-              </a:tr>
-              <a:tr h="653142">
-                <a:tc>
-                  <a:txBody>
-                    <a:bodyPr/>
-                    <a:lstStyle/>
-                    <a:p>
-                      <a:pPr algn="ctr"/>
-                      <a:r>
-                        <a:rPr sz="1000" b="0">
-                          <a:solidFill>
-                            <a:srgbClr val="000000"/>
-                          </a:solidFill>
-                          <a:latin typeface="Microsoft YaHei"/>
-                        </a:rPr>
-                        <a:t>5</a:t>
-                      </a:r>
-                    </a:p>
-                  </a:txBody>
-                  <a:tcPr>
-                    <a:solidFill>
-                      <a:srgbClr val="DAECE2"/>
-                    </a:solidFill>
-                  </a:tcPr>
-                </a:tc>
-                <a:tc>
-                  <a:txBody>
-                    <a:bodyPr/>
-                    <a:lstStyle/>
-                    <a:p>
-                      <a:pPr algn="ctr"/>
-                      <a:r>
-                        <a:rPr sz="1000" b="0">
-                          <a:solidFill>
-                            <a:srgbClr val="000000"/>
-                          </a:solidFill>
-                          <a:latin typeface="Microsoft YaHei"/>
-                        </a:rPr>
-                        <a:t>NewsServiceImpl</a:t>
-                      </a:r>
-                    </a:p>
-                  </a:txBody>
-                  <a:tcPr>
-                    <a:solidFill>
-                      <a:srgbClr val="DAECE2"/>
-                    </a:solidFill>
-                  </a:tcPr>
-                </a:tc>
-                <a:tc>
-                  <a:txBody>
-                    <a:bodyPr/>
-                    <a:lstStyle/>
-                    <a:p>
-                      <a:pPr algn="ctr"/>
-                      <a:r>
-                        <a:rPr sz="1000" b="0">
-                          <a:solidFill>
-                            <a:srgbClr val="000000"/>
-                          </a:solidFill>
-                          <a:latin typeface="Microsoft YaHei"/>
-                        </a:rPr>
-                        <a:t>UT-NEWS-001~005</a:t>
-                      </a:r>
-                    </a:p>
-                  </a:txBody>
-                  <a:tcPr>
-                    <a:solidFill>
-                      <a:srgbClr val="DAECE2"/>
-                    </a:solidFill>
-                  </a:tcPr>
-                </a:tc>
-                <a:tc>
-                  <a:txBody>
-                    <a:bodyPr/>
-                    <a:lstStyle/>
-                    <a:p>
-                      <a:pPr algn="ctr"/>
-                      <a:r>
-                        <a:rPr sz="1000" b="0">
-                          <a:solidFill>
-                            <a:srgbClr val="000000"/>
-                          </a:solidFill>
-                          <a:latin typeface="Microsoft YaHei"/>
-                        </a:rPr>
-                        <a:t>5</a:t>
-                      </a:r>
-                    </a:p>
-                  </a:txBody>
-                  <a:tcPr>
-                    <a:solidFill>
-                      <a:srgbClr val="DAECE2"/>
-                    </a:solidFill>
-                  </a:tcPr>
-                </a:tc>
-                <a:tc>
-                  <a:txBody>
-                    <a:bodyPr/>
-                    <a:lstStyle/>
-                    <a:p>
-                      <a:pPr algn="ctr"/>
-                      <a:r>
-                        <a:rPr sz="1000" b="0">
-                          <a:solidFill>
-                            <a:srgbClr val="000000"/>
-                          </a:solidFill>
-                          <a:latin typeface="Microsoft YaHei"/>
-                        </a:rPr>
-                        <a:t>新闻列表、详情、维护</a:t>
-                      </a:r>
-                    </a:p>
-                  </a:txBody>
-                  <a:tcPr>
-                    <a:solidFill>
-                      <a:srgbClr val="DAECE2"/>
-                    </a:solidFill>
-                  </a:tcPr>
-                </a:tc>
-              </a:tr>
-              <a:tr h="653148">
-                <a:tc>
-                  <a:txBody>
-                    <a:bodyPr/>
-                    <a:lstStyle/>
-                    <a:p>
-                      <a:pPr algn="ctr"/>
-                      <a:r>
-                        <a:rPr sz="1000" b="0">
-                          <a:solidFill>
-                            <a:srgbClr val="000000"/>
-                          </a:solidFill>
-                          <a:latin typeface="Microsoft YaHei"/>
-                        </a:rPr>
-                        <a:t>6</a:t>
-                      </a:r>
-                    </a:p>
-                  </a:txBody>
-                  <a:tcPr>
-                    <a:solidFill>
-                      <a:srgbClr val="F1F7EC"/>
-                    </a:solidFill>
-                  </a:tcPr>
-                </a:tc>
-                <a:tc>
-                  <a:txBody>
-                    <a:bodyPr/>
-                    <a:lstStyle/>
-                    <a:p>
-                      <a:pPr algn="ctr"/>
-                      <a:r>
-                        <a:rPr sz="1000" b="0">
-                          <a:solidFill>
-                            <a:srgbClr val="000000"/>
-                          </a:solidFill>
-                          <a:latin typeface="Microsoft YaHei"/>
-                        </a:rPr>
-                        <a:t>OrderVo/MessageVo</a:t>
-                      </a:r>
-                    </a:p>
-                  </a:txBody>
-                  <a:tcPr>
-                    <a:solidFill>
-                      <a:srgbClr val="F1F7EC"/>
-                    </a:solidFill>
-                  </a:tcPr>
-                </a:tc>
-                <a:tc>
-                  <a:txBody>
-                    <a:bodyPr/>
-                    <a:lstStyle/>
-                    <a:p>
-                      <a:pPr algn="ctr"/>
-                      <a:r>
-                        <a:rPr sz="1000" b="0">
-                          <a:solidFill>
-                            <a:srgbClr val="000000"/>
-                          </a:solidFill>
-                          <a:latin typeface="Microsoft YaHei"/>
-                        </a:rPr>
-                        <a:t>UT-*VO-*</a:t>
-                      </a:r>
-                    </a:p>
-                  </a:txBody>
-                  <a:tcPr>
-                    <a:solidFill>
-                      <a:srgbClr val="F1F7EC"/>
-                    </a:solidFill>
-                  </a:tcPr>
-                </a:tc>
-                <a:tc>
-                  <a:txBody>
-                    <a:bodyPr/>
-                    <a:lstStyle/>
-                    <a:p>
-                      <a:pPr algn="ctr"/>
-                      <a:r>
-                        <a:rPr sz="1000" b="0">
-                          <a:solidFill>
-                            <a:srgbClr val="000000"/>
-                          </a:solidFill>
-                          <a:latin typeface="Microsoft YaHei"/>
-                        </a:rPr>
-                        <a:t>4</a:t>
-                      </a:r>
-                    </a:p>
-                  </a:txBody>
-                  <a:tcPr>
-                    <a:solidFill>
-                      <a:srgbClr val="F1F7EC"/>
-                    </a:solidFill>
-                  </a:tcPr>
-                </a:tc>
-                <a:tc>
-                  <a:txBody>
-                    <a:bodyPr/>
-                    <a:lstStyle/>
-                    <a:p>
-                      <a:pPr algn="ctr"/>
-                      <a:r>
-                        <a:rPr sz="1000" b="0">
-                          <a:solidFill>
-                            <a:srgbClr val="000000"/>
-                          </a:solidFill>
-                          <a:latin typeface="Microsoft YaHei"/>
-                        </a:rPr>
-                        <a:t>聚合查询与边界路径</a:t>
+                        <a:rPr sz="1200" b="0">
+                          <a:solidFill>
+                            <a:srgbClr val="000000"/>
+                          </a:solidFill>
+                          <a:latin typeface="Microsoft YaHei"/>
+                        </a:rPr>
+                        <a:t>VO 聚合查询与边界路径</a:t>
                       </a:r>
                     </a:p>
                   </a:txBody>
@@ -8685,8 +8622,8 @@
         </p:nvSpPr>
         <p:spPr>
           <a:xfrm>
-            <a:off x="137160" y="411480"/>
-            <a:ext cx="777240" cy="5029200"/>
+            <a:off x="228600" y="530352"/>
+            <a:ext cx="502920" cy="4709160"/>
           </a:xfrm>
           <a:prstGeom prst="rect">
             <a:avLst/>
@@ -8694,11 +8631,19 @@
           <a:noFill/>
         </p:spPr>
         <p:txBody>
-          <a:bodyPr wrap="none">
-            <a:normAutofit/>
+          <a:bodyPr wrap="none" lIns="0" rIns="0" tIns="0" bIns="0">
+            <a:spAutoFit/>
           </a:bodyPr>
           <a:lstStyle/>
           <a:p>
+            <a:pPr algn="ctr">
+              <a:lnSpc>
+                <a:spcPct val="85000"/>
+              </a:lnSpc>
+              <a:spcAft>
+                <a:spcPts val="0"/>
+              </a:spcAft>
+            </a:pPr>
             <a:r>
               <a:rPr sz="2200" b="1">
                 <a:solidFill>
@@ -8706,56 +8651,117 @@
                 </a:solidFill>
                 <a:latin typeface="Microsoft YaHei"/>
               </a:rPr>
-              <a:t>公共内容展示模块</a:t>
-            </a:r>
-          </a:p>
-        </p:txBody>
-      </p:sp>
-      <p:sp>
-        <p:nvSpPr>
-          <p:cNvPr id="11" name="TextBox 10"/>
-          <p:cNvSpPr txBox="1"/>
-          <p:nvPr/>
-        </p:nvSpPr>
-        <p:spPr>
-          <a:xfrm>
-            <a:off x="1005840" y="411480"/>
-            <a:ext cx="8778240" cy="329184"/>
-          </a:xfrm>
-          <a:prstGeom prst="rect">
-            <a:avLst/>
-          </a:prstGeom>
-          <a:noFill/>
-        </p:spPr>
-        <p:txBody>
-          <a:bodyPr wrap="none">
-            <a:normAutofit/>
-          </a:bodyPr>
-          <a:lstStyle/>
-          <a:p>
-            <a:r>
-              <a:rPr sz="1400" b="0">
+              <a:t>公</a:t>
+            </a:r>
+          </a:p>
+          <a:p>
+            <a:pPr algn="ctr">
+              <a:lnSpc>
+                <a:spcPct val="85000"/>
+              </a:lnSpc>
+              <a:spcAft>
+                <a:spcPts val="0"/>
+              </a:spcAft>
+            </a:pPr>
+            <a:r>
+              <a:rPr sz="2200" b="1">
                 <a:solidFill>
                   <a:srgbClr val="000000"/>
                 </a:solidFill>
                 <a:latin typeface="Microsoft YaHei"/>
               </a:rPr>
-              <a:t>（IndexController.java / VenueController.java / NewsController.java）</a:t>
+              <a:t>共</a:t>
+            </a:r>
+          </a:p>
+          <a:p>
+            <a:pPr algn="ctr">
+              <a:lnSpc>
+                <a:spcPct val="85000"/>
+              </a:lnSpc>
+              <a:spcAft>
+                <a:spcPts val="0"/>
+              </a:spcAft>
+            </a:pPr>
+            <a:r>
+              <a:rPr sz="2200" b="1">
+                <a:solidFill>
+                  <a:srgbClr val="000000"/>
+                </a:solidFill>
+                <a:latin typeface="Microsoft YaHei"/>
+              </a:rPr>
+              <a:t>展</a:t>
+            </a:r>
+          </a:p>
+          <a:p>
+            <a:pPr algn="ctr">
+              <a:lnSpc>
+                <a:spcPct val="85000"/>
+              </a:lnSpc>
+              <a:spcAft>
+                <a:spcPts val="0"/>
+              </a:spcAft>
+            </a:pPr>
+            <a:r>
+              <a:rPr sz="2200" b="1">
+                <a:solidFill>
+                  <a:srgbClr val="000000"/>
+                </a:solidFill>
+                <a:latin typeface="Microsoft YaHei"/>
+              </a:rPr>
+              <a:t>示</a:t>
+            </a:r>
+          </a:p>
+          <a:p>
+            <a:pPr algn="ctr">
+              <a:lnSpc>
+                <a:spcPct val="85000"/>
+              </a:lnSpc>
+              <a:spcAft>
+                <a:spcPts val="0"/>
+              </a:spcAft>
+            </a:pPr>
+            <a:r>
+              <a:rPr sz="2200" b="1">
+                <a:solidFill>
+                  <a:srgbClr val="000000"/>
+                </a:solidFill>
+                <a:latin typeface="Microsoft YaHei"/>
+              </a:rPr>
+              <a:t>模</a:t>
+            </a:r>
+          </a:p>
+          <a:p>
+            <a:pPr algn="ctr">
+              <a:lnSpc>
+                <a:spcPct val="85000"/>
+              </a:lnSpc>
+              <a:spcAft>
+                <a:spcPts val="0"/>
+              </a:spcAft>
+            </a:pPr>
+            <a:r>
+              <a:rPr sz="2200" b="1">
+                <a:solidFill>
+                  <a:srgbClr val="000000"/>
+                </a:solidFill>
+                <a:latin typeface="Microsoft YaHei"/>
+              </a:rPr>
+              <a:t>块</a:t>
             </a:r>
           </a:p>
         </p:txBody>
       </p:sp>
       <p:graphicFrame>
         <p:nvGraphicFramePr>
-          <p:cNvPr id="12" name="Table 11"/>
+          <p:cNvPr id="11" name="Table 10"/>
           <p:cNvGraphicFramePr>
             <a:graphicFrameLocks noGrp="1"/>
           </p:cNvGraphicFramePr>
           <p:nvPr/>
         </p:nvGraphicFramePr>
         <p:xfrm>
-          <a:off x="1051560" y="960120"/>
-          <a:ext cx="10607040" cy="4800600"/>
+          <a:off x="960120" y="896112"/>
+          <a:ext cx="10652760" cy="5166360"/>
         </p:xfrm>
         <a:graphic>
           <a:graphicData uri="http://schemas.openxmlformats.org/drawingml/2006/table">
@@ -8764,20 +8770,20 @@
                 <a:tableStyleId>{5C22544A-7EE6-4342-B048-85BDC9FD1C3A}</a:tableStyleId>
               </a:tblPr>
               <a:tblGrid>
-                <a:gridCol w="2651760"/>
-                <a:gridCol w="2651760"/>
-                <a:gridCol w="2651760"/>
-                <a:gridCol w="2651760"/>
+                <a:gridCol w="2663190"/>
+                <a:gridCol w="2663190"/>
+                <a:gridCol w="2663190"/>
+                <a:gridCol w="2663190"/>
               </a:tblGrid>
-              <a:tr h="685800">
-                <a:tc>
-                  <a:txBody>
-                    <a:bodyPr/>
-                    <a:lstStyle/>
-                    <a:p>
-                      <a:pPr algn="ctr"/>
-                      <a:r>
-                        <a:rPr sz="1100" b="1">
+              <a:tr h="738051">
+                <a:tc>
+                  <a:txBody>
+                    <a:bodyPr/>
+                    <a:lstStyle/>
+                    <a:p>
+                      <a:pPr algn="ctr"/>
+                      <a:r>
+                        <a:rPr sz="1300" b="1">
                           <a:solidFill>
                             <a:srgbClr val="FFFFFF"/>
                           </a:solidFill>
@@ -8800,7 +8806,7 @@
                     <a:p>
                       <a:pPr algn="ctr"/>
                       <a:r>
-                        <a:rPr sz="1100" b="1">
+                        <a:rPr sz="1300" b="1">
                           <a:solidFill>
                             <a:srgbClr val="FFFFFF"/>
                           </a:solidFill>
@@ -8823,13 +8829,13 @@
                     <a:p>
                       <a:pPr algn="ctr"/>
                       <a:r>
-                        <a:rPr sz="1100" b="1">
+                        <a:rPr sz="1300" b="1">
                           <a:solidFill>
                             <a:srgbClr val="FFFFFF"/>
                           </a:solidFill>
                           <a:latin typeface="Microsoft YaHei"/>
                         </a:rPr>
-                        <a:t>函数/路径</a:t>
+                        <a:t>代表场景</a:t>
                       </a:r>
                     </a:p>
                   </a:txBody>
@@ -8846,7 +8852,7 @@
                     <a:p>
                       <a:pPr algn="ctr"/>
                       <a:r>
-                        <a:rPr sz="1100" b="1">
+                        <a:rPr sz="1300" b="1">
                           <a:solidFill>
                             <a:srgbClr val="FFFFFF"/>
                           </a:solidFill>
@@ -8863,15 +8869,15 @@
                   </a:tcPr>
                 </a:tc>
               </a:tr>
-              <a:tr h="685800">
-                <a:tc>
-                  <a:txBody>
-                    <a:bodyPr/>
-                    <a:lstStyle/>
-                    <a:p>
-                      <a:pPr algn="ctr"/>
-                      <a:r>
-                        <a:rPr sz="1000" b="0">
+              <a:tr h="738051">
+                <a:tc>
+                  <a:txBody>
+                    <a:bodyPr/>
+                    <a:lstStyle/>
+                    <a:p>
+                      <a:pPr algn="ctr"/>
+                      <a:r>
+                        <a:rPr sz="1200" b="0">
                           <a:solidFill>
                             <a:srgbClr val="000000"/>
                           </a:solidFill>
@@ -8894,7 +8900,7 @@
                     <a:p>
                       <a:pPr algn="ctr"/>
                       <a:r>
-                        <a:rPr sz="1000" b="0">
+                        <a:rPr sz="1200" b="0">
                           <a:solidFill>
                             <a:srgbClr val="000000"/>
                           </a:solidFill>
@@ -8917,13 +8923,13 @@
                     <a:p>
                       <a:pPr algn="ctr"/>
                       <a:r>
-                        <a:rPr sz="1000" b="0">
-                          <a:solidFill>
-                            <a:srgbClr val="000000"/>
-                          </a:solidFill>
-                          <a:latin typeface="Microsoft YaHei"/>
-                        </a:rPr>
-                        <a:t>index(Model model)</a:t>
+                        <a:rPr sz="1200" b="0">
+                          <a:solidFill>
+                            <a:srgbClr val="000000"/>
+                          </a:solidFill>
+                          <a:latin typeface="Microsoft YaHei"/>
+                        </a:rPr>
+                        <a:t>首页内容正常加载</a:t>
                       </a:r>
                     </a:p>
                   </a:txBody>
@@ -8940,7 +8946,7 @@
                     <a:p>
                       <a:pPr algn="ctr"/>
                       <a:r>
-                        <a:rPr sz="1000" b="0">
+                        <a:rPr sz="1200" b="0">
                           <a:solidFill>
                             <a:srgbClr val="000000"/>
                           </a:solidFill>
@@ -8957,15 +8963,15 @@
                   </a:tcPr>
                 </a:tc>
               </a:tr>
-              <a:tr h="685800">
-                <a:tc>
-                  <a:txBody>
-                    <a:bodyPr/>
-                    <a:lstStyle/>
-                    <a:p>
-                      <a:pPr algn="ctr"/>
-                      <a:r>
-                        <a:rPr sz="1000" b="0">
+              <a:tr h="738051">
+                <a:tc>
+                  <a:txBody>
+                    <a:bodyPr/>
+                    <a:lstStyle/>
+                    <a:p>
+                      <a:pPr algn="ctr"/>
+                      <a:r>
+                        <a:rPr sz="1200" b="0">
                           <a:solidFill>
                             <a:srgbClr val="000000"/>
                           </a:solidFill>
@@ -8988,7 +8994,7 @@
                     <a:p>
                       <a:pPr algn="ctr"/>
                       <a:r>
-                        <a:rPr sz="1000" b="0">
+                        <a:rPr sz="1200" b="0">
                           <a:solidFill>
                             <a:srgbClr val="000000"/>
                           </a:solidFill>
@@ -9011,13 +9017,13 @@
                     <a:p>
                       <a:pPr algn="ctr"/>
                       <a:r>
-                        <a:rPr sz="1000" b="0">
-                          <a:solidFill>
-                            <a:srgbClr val="000000"/>
-                          </a:solidFill>
-                          <a:latin typeface="Microsoft YaHei"/>
-                        </a:rPr>
-                        <a:t>news(Model,int newsID)</a:t>
+                        <a:rPr sz="1200" b="0">
+                          <a:solidFill>
+                            <a:srgbClr val="000000"/>
+                          </a:solidFill>
+                          <a:latin typeface="Microsoft YaHei"/>
+                        </a:rPr>
+                        <a:t>按页展示新闻数据</a:t>
                       </a:r>
                     </a:p>
                   </a:txBody>
@@ -9034,7 +9040,7 @@
                     <a:p>
                       <a:pPr algn="ctr"/>
                       <a:r>
-                        <a:rPr sz="1000" b="0">
+                        <a:rPr sz="1200" b="0">
                           <a:solidFill>
                             <a:srgbClr val="000000"/>
                           </a:solidFill>
@@ -9051,15 +9057,15 @@
                   </a:tcPr>
                 </a:tc>
               </a:tr>
-              <a:tr h="685800">
-                <a:tc>
-                  <a:txBody>
-                    <a:bodyPr/>
-                    <a:lstStyle/>
-                    <a:p>
-                      <a:pPr algn="ctr"/>
-                      <a:r>
-                        <a:rPr sz="1000" b="0">
+              <a:tr h="738051">
+                <a:tc>
+                  <a:txBody>
+                    <a:bodyPr/>
+                    <a:lstStyle/>
+                    <a:p>
+                      <a:pPr algn="ctr"/>
+                      <a:r>
+                        <a:rPr sz="1200" b="0">
                           <a:solidFill>
                             <a:srgbClr val="000000"/>
                           </a:solidFill>
@@ -9082,7 +9088,7 @@
                     <a:p>
                       <a:pPr algn="ctr"/>
                       <a:r>
-                        <a:rPr sz="1000" b="0">
+                        <a:rPr sz="1200" b="0">
                           <a:solidFill>
                             <a:srgbClr val="000000"/>
                           </a:solidFill>
@@ -9105,13 +9111,13 @@
                     <a:p>
                       <a:pPr algn="ctr"/>
                       <a:r>
-                        <a:rPr sz="1000" b="0">
-                          <a:solidFill>
-                            <a:srgbClr val="000000"/>
-                          </a:solidFill>
-                          <a:latin typeface="Microsoft YaHei"/>
-                        </a:rPr>
-                        <a:t>news_list(... page ...)</a:t>
+                        <a:rPr sz="1200" b="0">
+                          <a:solidFill>
+                            <a:srgbClr val="000000"/>
+                          </a:solidFill>
+                          <a:latin typeface="Microsoft YaHei"/>
+                        </a:rPr>
+                        <a:t>查看存在 / 不存在新闻</a:t>
                       </a:r>
                     </a:p>
                   </a:txBody>
@@ -9128,7 +9134,7 @@
                     <a:p>
                       <a:pPr algn="ctr"/>
                       <a:r>
-                        <a:rPr sz="1000" b="0">
+                        <a:rPr sz="1200" b="0">
                           <a:solidFill>
                             <a:srgbClr val="000000"/>
                           </a:solidFill>
@@ -9145,15 +9151,15 @@
                   </a:tcPr>
                 </a:tc>
               </a:tr>
-              <a:tr h="685800">
-                <a:tc>
-                  <a:txBody>
-                    <a:bodyPr/>
-                    <a:lstStyle/>
-                    <a:p>
-                      <a:pPr algn="ctr"/>
-                      <a:r>
-                        <a:rPr sz="1000" b="0">
+              <a:tr h="738051">
+                <a:tc>
+                  <a:txBody>
+                    <a:bodyPr/>
+                    <a:lstStyle/>
+                    <a:p>
+                      <a:pPr algn="ctr"/>
+                      <a:r>
+                        <a:rPr sz="1200" b="0">
                           <a:solidFill>
                             <a:srgbClr val="000000"/>
                           </a:solidFill>
@@ -9176,7 +9182,7 @@
                     <a:p>
                       <a:pPr algn="ctr"/>
                       <a:r>
-                        <a:rPr sz="1000" b="0">
+                        <a:rPr sz="1200" b="0">
                           <a:solidFill>
                             <a:srgbClr val="000000"/>
                           </a:solidFill>
@@ -9199,13 +9205,13 @@
                     <a:p>
                       <a:pPr algn="ctr"/>
                       <a:r>
-                        <a:rPr sz="1000" b="0">
-                          <a:solidFill>
-                            <a:srgbClr val="000000"/>
-                          </a:solidFill>
-                          <a:latin typeface="Microsoft YaHei"/>
-                        </a:rPr>
-                        <a:t>venue_list(Model,int venueID)</a:t>
+                        <a:rPr sz="1200" b="0">
+                          <a:solidFill>
+                            <a:srgbClr val="000000"/>
+                          </a:solidFill>
+                          <a:latin typeface="Microsoft YaHei"/>
+                        </a:rPr>
+                        <a:t>展示场馆与分页信息</a:t>
                       </a:r>
                     </a:p>
                   </a:txBody>
@@ -9222,7 +9228,7 @@
                     <a:p>
                       <a:pPr algn="ctr"/>
                       <a:r>
-                        <a:rPr sz="1000" b="0">
+                        <a:rPr sz="1200" b="0">
                           <a:solidFill>
                             <a:srgbClr val="000000"/>
                           </a:solidFill>
@@ -9239,15 +9245,15 @@
                   </a:tcPr>
                 </a:tc>
               </a:tr>
-              <a:tr h="685800">
-                <a:tc>
-                  <a:txBody>
-                    <a:bodyPr/>
-                    <a:lstStyle/>
-                    <a:p>
-                      <a:pPr algn="ctr"/>
-                      <a:r>
-                        <a:rPr sz="1000" b="0">
+              <a:tr h="738051">
+                <a:tc>
+                  <a:txBody>
+                    <a:bodyPr/>
+                    <a:lstStyle/>
+                    <a:p>
+                      <a:pPr algn="ctr"/>
+                      <a:r>
+                        <a:rPr sz="1200" b="0">
                           <a:solidFill>
                             <a:srgbClr val="000000"/>
                           </a:solidFill>
@@ -9270,13 +9276,13 @@
                     <a:p>
                       <a:pPr algn="ctr"/>
                       <a:r>
-                        <a:rPr sz="1000" b="0">
-                          <a:solidFill>
-                            <a:srgbClr val="000000"/>
-                          </a:solidFill>
-                          <a:latin typeface="Microsoft YaHei"/>
-                        </a:rPr>
-                        <a:t>场馆预约入口</a:t>
+                        <a:rPr sz="1200" b="0">
+                          <a:solidFill>
+                            <a:srgbClr val="000000"/>
+                          </a:solidFill>
+                          <a:latin typeface="Microsoft YaHei"/>
+                        </a:rPr>
+                        <a:t>预约入口</a:t>
                       </a:r>
                     </a:p>
                   </a:txBody>
@@ -9293,13 +9299,13 @@
                     <a:p>
                       <a:pPr algn="ctr"/>
                       <a:r>
-                        <a:rPr sz="1000" b="0">
-                          <a:solidFill>
-                            <a:srgbClr val="000000"/>
-                          </a:solidFill>
-                          <a:latin typeface="Microsoft YaHei"/>
-                        </a:rPr>
-                        <a:t>venue_select(...)</a:t>
+                        <a:rPr sz="1200" b="0">
+                          <a:solidFill>
+                            <a:srgbClr val="000000"/>
+                          </a:solidFill>
+                          <a:latin typeface="Microsoft YaHei"/>
+                        </a:rPr>
+                        <a:t>登录与未登录访问分流</a:t>
                       </a:r>
                     </a:p>
                   </a:txBody>
@@ -9316,7 +9322,7 @@
                     <a:p>
                       <a:pPr algn="ctr"/>
                       <a:r>
-                        <a:rPr sz="1000" b="0">
+                        <a:rPr sz="1200" b="0">
                           <a:solidFill>
                             <a:srgbClr val="000000"/>
                           </a:solidFill>
@@ -9333,15 +9339,15 @@
                   </a:tcPr>
                 </a:tc>
               </a:tr>
-              <a:tr h="685800">
-                <a:tc>
-                  <a:txBody>
-                    <a:bodyPr/>
-                    <a:lstStyle/>
-                    <a:p>
-                      <a:pPr algn="ctr"/>
-                      <a:r>
-                        <a:rPr sz="1000" b="0">
+              <a:tr h="738054">
+                <a:tc>
+                  <a:txBody>
+                    <a:bodyPr/>
+                    <a:lstStyle/>
+                    <a:p>
+                      <a:pPr algn="ctr"/>
+                      <a:r>
+                        <a:rPr sz="1200" b="0">
                           <a:solidFill>
                             <a:srgbClr val="000000"/>
                           </a:solidFill>
@@ -9364,7 +9370,7 @@
                     <a:p>
                       <a:pPr algn="ctr"/>
                       <a:r>
-                        <a:rPr sz="1000" b="0">
+                        <a:rPr sz="1200" b="0">
                           <a:solidFill>
                             <a:srgbClr val="000000"/>
                           </a:solidFill>
@@ -9387,13 +9393,13 @@
                     <a:p>
                       <a:pPr algn="ctr"/>
                       <a:r>
-                        <a:rPr sz="1000" b="0">
-                          <a:solidFill>
-                            <a:srgbClr val="000000"/>
-                          </a:solidFill>
-                          <a:latin typeface="Microsoft YaHei"/>
-                        </a:rPr>
-                        <a:t>checkVenueName(String venueName)</a:t>
+                        <a:rPr sz="1200" b="0">
+                          <a:solidFill>
+                            <a:srgbClr val="000000"/>
+                          </a:solidFill>
+                          <a:latin typeface="Microsoft YaHei"/>
+                        </a:rPr>
+                        <a:t>按名称查询有效/无效场馆</a:t>
                       </a:r>
                     </a:p>
                   </a:txBody>
@@ -9410,7 +9416,7 @@
                     <a:p>
                       <a:pPr algn="ctr"/>
                       <a:r>
-                        <a:rPr sz="1000" b="0">
+                        <a:rPr sz="1200" b="0">
                           <a:solidFill>
                             <a:srgbClr val="000000"/>
                           </a:solidFill>
@@ -9792,8 +9798,8 @@
         </p:nvSpPr>
         <p:spPr>
           <a:xfrm>
-            <a:off x="137160" y="411480"/>
-            <a:ext cx="777240" cy="5029200"/>
+            <a:off x="228600" y="530352"/>
+            <a:ext cx="502920" cy="4709160"/>
           </a:xfrm>
           <a:prstGeom prst="rect">
             <a:avLst/>
@@ -9801,11 +9807,19 @@
           <a:noFill/>
         </p:spPr>
         <p:txBody>
-          <a:bodyPr wrap="none">
-            <a:normAutofit/>
+          <a:bodyPr wrap="none" lIns="0" rIns="0" tIns="0" bIns="0">
+            <a:spAutoFit/>
           </a:bodyPr>
           <a:lstStyle/>
           <a:p>
+            <a:pPr algn="ctr">
+              <a:lnSpc>
+                <a:spcPct val="85000"/>
+              </a:lnSpc>
+              <a:spcAft>
+                <a:spcPts val="0"/>
+              </a:spcAft>
+            </a:pPr>
             <a:r>
               <a:rPr sz="2200" b="1">
                 <a:solidFill>
@@ -9813,56 +9827,117 @@
                 </a:solidFill>
                 <a:latin typeface="Microsoft YaHei"/>
               </a:rPr>
-              <a:t>预约订单管理模块</a:t>
-            </a:r>
-          </a:p>
-        </p:txBody>
-      </p:sp>
-      <p:sp>
-        <p:nvSpPr>
-          <p:cNvPr id="11" name="TextBox 10"/>
-          <p:cNvSpPr txBox="1"/>
-          <p:nvPr/>
-        </p:nvSpPr>
-        <p:spPr>
-          <a:xfrm>
-            <a:off x="1051560" y="411480"/>
-            <a:ext cx="9052560" cy="329184"/>
-          </a:xfrm>
-          <a:prstGeom prst="rect">
-            <a:avLst/>
-          </a:prstGeom>
-          <a:noFill/>
-        </p:spPr>
-        <p:txBody>
-          <a:bodyPr wrap="none">
-            <a:normAutofit/>
-          </a:bodyPr>
-          <a:lstStyle/>
-          <a:p>
-            <a:r>
-              <a:rPr sz="1400" b="0">
+              <a:t>预</a:t>
+            </a:r>
+          </a:p>
+          <a:p>
+            <a:pPr algn="ctr">
+              <a:lnSpc>
+                <a:spcPct val="85000"/>
+              </a:lnSpc>
+              <a:spcAft>
+                <a:spcPts val="0"/>
+              </a:spcAft>
+            </a:pPr>
+            <a:r>
+              <a:rPr sz="2200" b="1">
                 <a:solidFill>
                   <a:srgbClr val="000000"/>
                 </a:solidFill>
                 <a:latin typeface="Microsoft YaHei"/>
               </a:rPr>
-              <a:t>（OrderController.java / AdminOrderController.java / OrderServiceImpl.java）</a:t>
+              <a:t>约</a:t>
+            </a:r>
+          </a:p>
+          <a:p>
+            <a:pPr algn="ctr">
+              <a:lnSpc>
+                <a:spcPct val="85000"/>
+              </a:lnSpc>
+              <a:spcAft>
+                <a:spcPts val="0"/>
+              </a:spcAft>
+            </a:pPr>
+            <a:r>
+              <a:rPr sz="2200" b="1">
+                <a:solidFill>
+                  <a:srgbClr val="000000"/>
+                </a:solidFill>
+                <a:latin typeface="Microsoft YaHei"/>
+              </a:rPr>
+              <a:t>订</a:t>
+            </a:r>
+          </a:p>
+          <a:p>
+            <a:pPr algn="ctr">
+              <a:lnSpc>
+                <a:spcPct val="85000"/>
+              </a:lnSpc>
+              <a:spcAft>
+                <a:spcPts val="0"/>
+              </a:spcAft>
+            </a:pPr>
+            <a:r>
+              <a:rPr sz="2200" b="1">
+                <a:solidFill>
+                  <a:srgbClr val="000000"/>
+                </a:solidFill>
+                <a:latin typeface="Microsoft YaHei"/>
+              </a:rPr>
+              <a:t>单</a:t>
+            </a:r>
+          </a:p>
+          <a:p>
+            <a:pPr algn="ctr">
+              <a:lnSpc>
+                <a:spcPct val="85000"/>
+              </a:lnSpc>
+              <a:spcAft>
+                <a:spcPts val="0"/>
+              </a:spcAft>
+            </a:pPr>
+            <a:r>
+              <a:rPr sz="2200" b="1">
+                <a:solidFill>
+                  <a:srgbClr val="000000"/>
+                </a:solidFill>
+                <a:latin typeface="Microsoft YaHei"/>
+              </a:rPr>
+              <a:t>模</a:t>
+            </a:r>
+          </a:p>
+          <a:p>
+            <a:pPr algn="ctr">
+              <a:lnSpc>
+                <a:spcPct val="85000"/>
+              </a:lnSpc>
+              <a:spcAft>
+                <a:spcPts val="0"/>
+              </a:spcAft>
+            </a:pPr>
+            <a:r>
+              <a:rPr sz="2200" b="1">
+                <a:solidFill>
+                  <a:srgbClr val="000000"/>
+                </a:solidFill>
+                <a:latin typeface="Microsoft YaHei"/>
+              </a:rPr>
+              <a:t>块</a:t>
             </a:r>
           </a:p>
         </p:txBody>
       </p:sp>
       <p:graphicFrame>
         <p:nvGraphicFramePr>
-          <p:cNvPr id="12" name="Table 11"/>
+          <p:cNvPr id="11" name="Table 10"/>
           <p:cNvGraphicFramePr>
             <a:graphicFrameLocks noGrp="1"/>
           </p:cNvGraphicFramePr>
           <p:nvPr/>
         </p:nvGraphicFramePr>
         <p:xfrm>
-          <a:off x="1051560" y="960120"/>
-          <a:ext cx="10607040" cy="4800600"/>
+          <a:off x="960120" y="896112"/>
+          <a:ext cx="10652760" cy="5166360"/>
         </p:xfrm>
         <a:graphic>
           <a:graphicData uri="http://schemas.openxmlformats.org/drawingml/2006/table">
@@ -9871,20 +9946,20 @@
                 <a:tableStyleId>{5C22544A-7EE6-4342-B048-85BDC9FD1C3A}</a:tableStyleId>
               </a:tblPr>
               <a:tblGrid>
-                <a:gridCol w="2651760"/>
-                <a:gridCol w="2651760"/>
-                <a:gridCol w="2651760"/>
-                <a:gridCol w="2651760"/>
+                <a:gridCol w="2663190"/>
+                <a:gridCol w="2663190"/>
+                <a:gridCol w="2663190"/>
+                <a:gridCol w="2663190"/>
               </a:tblGrid>
-              <a:tr h="685800">
-                <a:tc>
-                  <a:txBody>
-                    <a:bodyPr/>
-                    <a:lstStyle/>
-                    <a:p>
-                      <a:pPr algn="ctr"/>
-                      <a:r>
-                        <a:rPr sz="1100" b="1">
+              <a:tr h="738051">
+                <a:tc>
+                  <a:txBody>
+                    <a:bodyPr/>
+                    <a:lstStyle/>
+                    <a:p>
+                      <a:pPr algn="ctr"/>
+                      <a:r>
+                        <a:rPr sz="1300" b="1">
                           <a:solidFill>
                             <a:srgbClr val="FFFFFF"/>
                           </a:solidFill>
@@ -9907,7 +9982,7 @@
                     <a:p>
                       <a:pPr algn="ctr"/>
                       <a:r>
-                        <a:rPr sz="1100" b="1">
+                        <a:rPr sz="1300" b="1">
                           <a:solidFill>
                             <a:srgbClr val="FFFFFF"/>
                           </a:solidFill>
@@ -9930,13 +10005,13 @@
                     <a:p>
                       <a:pPr algn="ctr"/>
                       <a:r>
-                        <a:rPr sz="1100" b="1">
+                        <a:rPr sz="1300" b="1">
                           <a:solidFill>
                             <a:srgbClr val="FFFFFF"/>
                           </a:solidFill>
                           <a:latin typeface="Microsoft YaHei"/>
                         </a:rPr>
-                        <a:t>函数/路径</a:t>
+                        <a:t>代表场景</a:t>
                       </a:r>
                     </a:p>
                   </a:txBody>
@@ -9953,7 +10028,7 @@
                     <a:p>
                       <a:pPr algn="ctr"/>
                       <a:r>
-                        <a:rPr sz="1100" b="1">
+                        <a:rPr sz="1300" b="1">
                           <a:solidFill>
                             <a:srgbClr val="FFFFFF"/>
                           </a:solidFill>
@@ -9970,15 +10045,15 @@
                   </a:tcPr>
                 </a:tc>
               </a:tr>
-              <a:tr h="685800">
-                <a:tc>
-                  <a:txBody>
-                    <a:bodyPr/>
-                    <a:lstStyle/>
-                    <a:p>
-                      <a:pPr algn="ctr"/>
-                      <a:r>
-                        <a:rPr sz="1000" b="0">
+              <a:tr h="738051">
+                <a:tc>
+                  <a:txBody>
+                    <a:bodyPr/>
+                    <a:lstStyle/>
+                    <a:p>
+                      <a:pPr algn="ctr"/>
+                      <a:r>
+                        <a:rPr sz="1200" b="0">
                           <a:solidFill>
                             <a:srgbClr val="000000"/>
                           </a:solidFill>
@@ -10001,7 +10076,7 @@
                     <a:p>
                       <a:pPr algn="ctr"/>
                       <a:r>
-                        <a:rPr sz="1000" b="0">
+                        <a:rPr sz="1200" b="0">
                           <a:solidFill>
                             <a:srgbClr val="000000"/>
                           </a:solidFill>
@@ -10024,13 +10099,13 @@
                     <a:p>
                       <a:pPr algn="ctr"/>
                       <a:r>
-                        <a:rPr sz="1000" b="0">
-                          <a:solidFill>
-                            <a:srgbClr val="000000"/>
-                          </a:solidFill>
-                          <a:latin typeface="Microsoft YaHei"/>
-                        </a:rPr>
-                        <a:t>order_list(... page ...)</a:t>
+                        <a:rPr sz="1200" b="0">
+                          <a:solidFill>
+                            <a:srgbClr val="000000"/>
+                          </a:solidFill>
+                          <a:latin typeface="Microsoft YaHei"/>
+                        </a:rPr>
+                        <a:t>分页查看个人订单</a:t>
                       </a:r>
                     </a:p>
                   </a:txBody>
@@ -10047,7 +10122,7 @@
                     <a:p>
                       <a:pPr algn="ctr"/>
                       <a:r>
-                        <a:rPr sz="1000" b="0">
+                        <a:rPr sz="1200" b="0">
                           <a:solidFill>
                             <a:srgbClr val="000000"/>
                           </a:solidFill>
@@ -10064,15 +10139,15 @@
                   </a:tcPr>
                 </a:tc>
               </a:tr>
-              <a:tr h="685800">
-                <a:tc>
-                  <a:txBody>
-                    <a:bodyPr/>
-                    <a:lstStyle/>
-                    <a:p>
-                      <a:pPr algn="ctr"/>
-                      <a:r>
-                        <a:rPr sz="1000" b="0">
+              <a:tr h="738051">
+                <a:tc>
+                  <a:txBody>
+                    <a:bodyPr/>
+                    <a:lstStyle/>
+                    <a:p>
+                      <a:pPr algn="ctr"/>
+                      <a:r>
+                        <a:rPr sz="1200" b="0">
                           <a:solidFill>
                             <a:srgbClr val="000000"/>
                           </a:solidFill>
@@ -10095,7 +10170,7 @@
                     <a:p>
                       <a:pPr algn="ctr"/>
                       <a:r>
-                        <a:rPr sz="1000" b="0">
+                        <a:rPr sz="1200" b="0">
                           <a:solidFill>
                             <a:srgbClr val="000000"/>
                           </a:solidFill>
@@ -10118,13 +10193,13 @@
                     <a:p>
                       <a:pPr algn="ctr"/>
                       <a:r>
-                        <a:rPr sz="1000" b="0">
-                          <a:solidFill>
-                            <a:srgbClr val="000000"/>
-                          </a:solidFill>
-                          <a:latin typeface="Microsoft YaHei"/>
-                        </a:rPr>
-                        <a:t>order_add(...)</a:t>
+                        <a:rPr sz="1200" b="0">
+                          <a:solidFill>
+                            <a:srgbClr val="000000"/>
+                          </a:solidFill>
+                          <a:latin typeface="Microsoft YaHei"/>
+                        </a:rPr>
+                        <a:t>合法预约 / 无效输入</a:t>
                       </a:r>
                     </a:p>
                   </a:txBody>
@@ -10141,13 +10216,13 @@
                     <a:p>
                       <a:pPr algn="ctr"/>
                       <a:r>
-                        <a:rPr sz="1000" b="0">
-                          <a:solidFill>
-                            <a:srgbClr val="000000"/>
-                          </a:solidFill>
-                          <a:latin typeface="Microsoft YaHei"/>
-                        </a:rPr>
-                        <a:t>有效类/无效类</a:t>
+                        <a:rPr sz="1200" b="0">
+                          <a:solidFill>
+                            <a:srgbClr val="000000"/>
+                          </a:solidFill>
+                          <a:latin typeface="Microsoft YaHei"/>
+                        </a:rPr>
+                        <a:t>有效类 / 无效类</a:t>
                       </a:r>
                     </a:p>
                   </a:txBody>
@@ -10158,15 +10233,15 @@
                   </a:tcPr>
                 </a:tc>
               </a:tr>
-              <a:tr h="685800">
-                <a:tc>
-                  <a:txBody>
-                    <a:bodyPr/>
-                    <a:lstStyle/>
-                    <a:p>
-                      <a:pPr algn="ctr"/>
-                      <a:r>
-                        <a:rPr sz="1000" b="0">
+              <a:tr h="738051">
+                <a:tc>
+                  <a:txBody>
+                    <a:bodyPr/>
+                    <a:lstStyle/>
+                    <a:p>
+                      <a:pPr algn="ctr"/>
+                      <a:r>
+                        <a:rPr sz="1200" b="0">
                           <a:solidFill>
                             <a:srgbClr val="000000"/>
                           </a:solidFill>
@@ -10189,7 +10264,7 @@
                     <a:p>
                       <a:pPr algn="ctr"/>
                       <a:r>
-                        <a:rPr sz="1000" b="0">
+                        <a:rPr sz="1200" b="0">
                           <a:solidFill>
                             <a:srgbClr val="000000"/>
                           </a:solidFill>
@@ -10212,13 +10287,13 @@
                     <a:p>
                       <a:pPr algn="ctr"/>
                       <a:r>
-                        <a:rPr sz="1000" b="0">
-                          <a:solidFill>
-                            <a:srgbClr val="000000"/>
-                          </a:solidFill>
-                          <a:latin typeface="Microsoft YaHei"/>
-                        </a:rPr>
-                        <a:t>order_cancel(...)</a:t>
+                        <a:rPr sz="1200" b="0">
+                          <a:solidFill>
+                            <a:srgbClr val="000000"/>
+                          </a:solidFill>
+                          <a:latin typeface="Microsoft YaHei"/>
+                        </a:rPr>
+                        <a:t>本人订单与非本人订单</a:t>
                       </a:r>
                     </a:p>
                   </a:txBody>
@@ -10235,7 +10310,7 @@
                     <a:p>
                       <a:pPr algn="ctr"/>
                       <a:r>
-                        <a:rPr sz="1000" b="0">
+                        <a:rPr sz="1200" b="0">
                           <a:solidFill>
                             <a:srgbClr val="000000"/>
                           </a:solidFill>
@@ -10252,15 +10327,15 @@
                   </a:tcPr>
                 </a:tc>
               </a:tr>
-              <a:tr h="685800">
-                <a:tc>
-                  <a:txBody>
-                    <a:bodyPr/>
-                    <a:lstStyle/>
-                    <a:p>
-                      <a:pPr algn="ctr"/>
-                      <a:r>
-                        <a:rPr sz="1000" b="0">
+              <a:tr h="738051">
+                <a:tc>
+                  <a:txBody>
+                    <a:bodyPr/>
+                    <a:lstStyle/>
+                    <a:p>
+                      <a:pPr algn="ctr"/>
+                      <a:r>
+                        <a:rPr sz="1200" b="0">
                           <a:solidFill>
                             <a:srgbClr val="000000"/>
                           </a:solidFill>
@@ -10283,7 +10358,7 @@
                     <a:p>
                       <a:pPr algn="ctr"/>
                       <a:r>
-                        <a:rPr sz="1000" b="0">
+                        <a:rPr sz="1200" b="0">
                           <a:solidFill>
                             <a:srgbClr val="000000"/>
                           </a:solidFill>
@@ -10306,13 +10381,13 @@
                     <a:p>
                       <a:pPr algn="ctr"/>
                       <a:r>
-                        <a:rPr sz="1000" b="0">
-                          <a:solidFill>
-                            <a:srgbClr val="000000"/>
-                          </a:solidFill>
-                          <a:latin typeface="Microsoft YaHei"/>
-                        </a:rPr>
-                        <a:t>order_manage(...)</a:t>
+                        <a:rPr sz="1200" b="0">
+                          <a:solidFill>
+                            <a:srgbClr val="000000"/>
+                          </a:solidFill>
+                          <a:latin typeface="Microsoft YaHei"/>
+                        </a:rPr>
+                        <a:t>按状态筛选订单</a:t>
                       </a:r>
                     </a:p>
                   </a:txBody>
@@ -10329,7 +10404,7 @@
                     <a:p>
                       <a:pPr algn="ctr"/>
                       <a:r>
-                        <a:rPr sz="1000" b="0">
+                        <a:rPr sz="1200" b="0">
                           <a:solidFill>
                             <a:srgbClr val="000000"/>
                           </a:solidFill>
@@ -10346,15 +10421,15 @@
                   </a:tcPr>
                 </a:tc>
               </a:tr>
-              <a:tr h="685800">
-                <a:tc>
-                  <a:txBody>
-                    <a:bodyPr/>
-                    <a:lstStyle/>
-                    <a:p>
-                      <a:pPr algn="ctr"/>
-                      <a:r>
-                        <a:rPr sz="1000" b="0">
+              <a:tr h="738051">
+                <a:tc>
+                  <a:txBody>
+                    <a:bodyPr/>
+                    <a:lstStyle/>
+                    <a:p>
+                      <a:pPr algn="ctr"/>
+                      <a:r>
+                        <a:rPr sz="1200" b="0">
                           <a:solidFill>
                             <a:srgbClr val="000000"/>
                           </a:solidFill>
@@ -10377,7 +10452,7 @@
                     <a:p>
                       <a:pPr algn="ctr"/>
                       <a:r>
-                        <a:rPr sz="1000" b="0">
+                        <a:rPr sz="1200" b="0">
                           <a:solidFill>
                             <a:srgbClr val="000000"/>
                           </a:solidFill>
@@ -10400,13 +10475,13 @@
                     <a:p>
                       <a:pPr algn="ctr"/>
                       <a:r>
-                        <a:rPr sz="1000" b="0">
-                          <a:solidFill>
-                            <a:srgbClr val="000000"/>
-                          </a:solidFill>
-                          <a:latin typeface="Microsoft YaHei"/>
-                        </a:rPr>
-                        <a:t>order_check(... state ...)</a:t>
+                        <a:rPr sz="1200" b="0">
+                          <a:solidFill>
+                            <a:srgbClr val="000000"/>
+                          </a:solidFill>
+                          <a:latin typeface="Microsoft YaHei"/>
+                        </a:rPr>
+                        <a:t>通过 / 拒绝两类结果</a:t>
                       </a:r>
                     </a:p>
                   </a:txBody>
@@ -10423,7 +10498,7 @@
                     <a:p>
                       <a:pPr algn="ctr"/>
                       <a:r>
-                        <a:rPr sz="1000" b="0">
+                        <a:rPr sz="1200" b="0">
                           <a:solidFill>
                             <a:srgbClr val="000000"/>
                           </a:solidFill>
@@ -10440,15 +10515,15 @@
                   </a:tcPr>
                 </a:tc>
               </a:tr>
-              <a:tr h="685800">
-                <a:tc>
-                  <a:txBody>
-                    <a:bodyPr/>
-                    <a:lstStyle/>
-                    <a:p>
-                      <a:pPr algn="ctr"/>
-                      <a:r>
-                        <a:rPr sz="1000" b="0">
+              <a:tr h="738054">
+                <a:tc>
+                  <a:txBody>
+                    <a:bodyPr/>
+                    <a:lstStyle/>
+                    <a:p>
+                      <a:pPr algn="ctr"/>
+                      <a:r>
+                        <a:rPr sz="1200" b="0">
                           <a:solidFill>
                             <a:srgbClr val="000000"/>
                           </a:solidFill>
@@ -10471,13 +10546,13 @@
                     <a:p>
                       <a:pPr algn="ctr"/>
                       <a:r>
-                        <a:rPr sz="1000" b="0">
-                          <a:solidFill>
-                            <a:srgbClr val="000000"/>
-                          </a:solidFill>
-                          <a:latin typeface="Microsoft YaHei"/>
-                        </a:rPr>
-                        <a:t>service 状态推进</a:t>
+                        <a:rPr sz="1200" b="0">
+                          <a:solidFill>
+                            <a:srgbClr val="000000"/>
+                          </a:solidFill>
+                          <a:latin typeface="Microsoft YaHei"/>
+                        </a:rPr>
+                        <a:t>状态推进</a:t>
                       </a:r>
                     </a:p>
                   </a:txBody>
@@ -10494,13 +10569,13 @@
                     <a:p>
                       <a:pPr algn="ctr"/>
                       <a:r>
-                        <a:rPr sz="1000" b="0">
-                          <a:solidFill>
-                            <a:srgbClr val="000000"/>
-                          </a:solidFill>
-                          <a:latin typeface="Microsoft YaHei"/>
-                        </a:rPr>
-                        <a:t>add/delete/select/check</a:t>
+                        <a:rPr sz="1200" b="0">
+                          <a:solidFill>
+                            <a:srgbClr val="000000"/>
+                          </a:solidFill>
+                          <a:latin typeface="Microsoft YaHei"/>
+                        </a:rPr>
+                        <a:t>创建、取消、审核全流程</a:t>
                       </a:r>
                     </a:p>
                   </a:txBody>
@@ -10517,7 +10592,7 @@
                     <a:p>
                       <a:pPr algn="ctr"/>
                       <a:r>
-                        <a:rPr sz="1000" b="0">
+                        <a:rPr sz="1200" b="0">
                           <a:solidFill>
                             <a:srgbClr val="000000"/>
                           </a:solidFill>
@@ -10899,8 +10974,8 @@
         </p:nvSpPr>
         <p:spPr>
           <a:xfrm>
-            <a:off x="137160" y="411480"/>
-            <a:ext cx="777240" cy="5029200"/>
+            <a:off x="228600" y="530352"/>
+            <a:ext cx="502920" cy="4709160"/>
           </a:xfrm>
           <a:prstGeom prst="rect">
             <a:avLst/>
@@ -10908,11 +10983,19 @@
           <a:noFill/>
         </p:spPr>
         <p:txBody>
-          <a:bodyPr wrap="none">
-            <a:normAutofit/>
+          <a:bodyPr wrap="none" lIns="0" rIns="0" tIns="0" bIns="0">
+            <a:spAutoFit/>
           </a:bodyPr>
           <a:lstStyle/>
           <a:p>
+            <a:pPr algn="ctr">
+              <a:lnSpc>
+                <a:spcPct val="85000"/>
+              </a:lnSpc>
+              <a:spcAft>
+                <a:spcPts val="0"/>
+              </a:spcAft>
+            </a:pPr>
             <a:r>
               <a:rPr sz="2200" b="1">
                 <a:solidFill>
@@ -10920,56 +11003,117 @@
                 </a:solidFill>
                 <a:latin typeface="Microsoft YaHei"/>
               </a:rPr>
-              <a:t>用户注册登录模块</a:t>
-            </a:r>
-          </a:p>
-        </p:txBody>
-      </p:sp>
-      <p:sp>
-        <p:nvSpPr>
-          <p:cNvPr id="11" name="TextBox 10"/>
-          <p:cNvSpPr txBox="1"/>
-          <p:nvPr/>
-        </p:nvSpPr>
-        <p:spPr>
-          <a:xfrm>
-            <a:off x="1051560" y="411480"/>
-            <a:ext cx="8869680" cy="329184"/>
-          </a:xfrm>
-          <a:prstGeom prst="rect">
-            <a:avLst/>
-          </a:prstGeom>
-          <a:noFill/>
-        </p:spPr>
-        <p:txBody>
-          <a:bodyPr wrap="none">
-            <a:normAutofit/>
-          </a:bodyPr>
-          <a:lstStyle/>
-          <a:p>
-            <a:r>
-              <a:rPr sz="1400" b="0">
+              <a:t>用</a:t>
+            </a:r>
+          </a:p>
+          <a:p>
+            <a:pPr algn="ctr">
+              <a:lnSpc>
+                <a:spcPct val="85000"/>
+              </a:lnSpc>
+              <a:spcAft>
+                <a:spcPts val="0"/>
+              </a:spcAft>
+            </a:pPr>
+            <a:r>
+              <a:rPr sz="2200" b="1">
                 <a:solidFill>
                   <a:srgbClr val="000000"/>
                 </a:solidFill>
                 <a:latin typeface="Microsoft YaHei"/>
               </a:rPr>
-              <a:t>（UserController.java / AdminUserController.java / UserServiceImpl.java）</a:t>
+              <a:t>户</a:t>
+            </a:r>
+          </a:p>
+          <a:p>
+            <a:pPr algn="ctr">
+              <a:lnSpc>
+                <a:spcPct val="85000"/>
+              </a:lnSpc>
+              <a:spcAft>
+                <a:spcPts val="0"/>
+              </a:spcAft>
+            </a:pPr>
+            <a:r>
+              <a:rPr sz="2200" b="1">
+                <a:solidFill>
+                  <a:srgbClr val="000000"/>
+                </a:solidFill>
+                <a:latin typeface="Microsoft YaHei"/>
+              </a:rPr>
+              <a:t>登</a:t>
+            </a:r>
+          </a:p>
+          <a:p>
+            <a:pPr algn="ctr">
+              <a:lnSpc>
+                <a:spcPct val="85000"/>
+              </a:lnSpc>
+              <a:spcAft>
+                <a:spcPts val="0"/>
+              </a:spcAft>
+            </a:pPr>
+            <a:r>
+              <a:rPr sz="2200" b="1">
+                <a:solidFill>
+                  <a:srgbClr val="000000"/>
+                </a:solidFill>
+                <a:latin typeface="Microsoft YaHei"/>
+              </a:rPr>
+              <a:t>录</a:t>
+            </a:r>
+          </a:p>
+          <a:p>
+            <a:pPr algn="ctr">
+              <a:lnSpc>
+                <a:spcPct val="85000"/>
+              </a:lnSpc>
+              <a:spcAft>
+                <a:spcPts val="0"/>
+              </a:spcAft>
+            </a:pPr>
+            <a:r>
+              <a:rPr sz="2200" b="1">
+                <a:solidFill>
+                  <a:srgbClr val="000000"/>
+                </a:solidFill>
+                <a:latin typeface="Microsoft YaHei"/>
+              </a:rPr>
+              <a:t>模</a:t>
+            </a:r>
+          </a:p>
+          <a:p>
+            <a:pPr algn="ctr">
+              <a:lnSpc>
+                <a:spcPct val="85000"/>
+              </a:lnSpc>
+              <a:spcAft>
+                <a:spcPts val="0"/>
+              </a:spcAft>
+            </a:pPr>
+            <a:r>
+              <a:rPr sz="2200" b="1">
+                <a:solidFill>
+                  <a:srgbClr val="000000"/>
+                </a:solidFill>
+                <a:latin typeface="Microsoft YaHei"/>
+              </a:rPr>
+              <a:t>块</a:t>
             </a:r>
           </a:p>
         </p:txBody>
       </p:sp>
       <p:graphicFrame>
         <p:nvGraphicFramePr>
-          <p:cNvPr id="12" name="Table 11"/>
+          <p:cNvPr id="11" name="Table 10"/>
           <p:cNvGraphicFramePr>
             <a:graphicFrameLocks noGrp="1"/>
           </p:cNvGraphicFramePr>
           <p:nvPr/>
         </p:nvGraphicFramePr>
         <p:xfrm>
-          <a:off x="1051560" y="960120"/>
-          <a:ext cx="10607040" cy="4800600"/>
+          <a:off x="960120" y="896112"/>
+          <a:ext cx="10652760" cy="5166360"/>
         </p:xfrm>
         <a:graphic>
           <a:graphicData uri="http://schemas.openxmlformats.org/drawingml/2006/table">
@@ -10978,20 +11122,20 @@
                 <a:tableStyleId>{5C22544A-7EE6-4342-B048-85BDC9FD1C3A}</a:tableStyleId>
               </a:tblPr>
               <a:tblGrid>
-                <a:gridCol w="2651760"/>
-                <a:gridCol w="2651760"/>
-                <a:gridCol w="2651760"/>
-                <a:gridCol w="2651760"/>
+                <a:gridCol w="2663190"/>
+                <a:gridCol w="2663190"/>
+                <a:gridCol w="2663190"/>
+                <a:gridCol w="2663190"/>
               </a:tblGrid>
-              <a:tr h="685800">
-                <a:tc>
-                  <a:txBody>
-                    <a:bodyPr/>
-                    <a:lstStyle/>
-                    <a:p>
-                      <a:pPr algn="ctr"/>
-                      <a:r>
-                        <a:rPr sz="1100" b="1">
+              <a:tr h="738051">
+                <a:tc>
+                  <a:txBody>
+                    <a:bodyPr/>
+                    <a:lstStyle/>
+                    <a:p>
+                      <a:pPr algn="ctr"/>
+                      <a:r>
+                        <a:rPr sz="1300" b="1">
                           <a:solidFill>
                             <a:srgbClr val="FFFFFF"/>
                           </a:solidFill>
@@ -11014,7 +11158,7 @@
                     <a:p>
                       <a:pPr algn="ctr"/>
                       <a:r>
-                        <a:rPr sz="1100" b="1">
+                        <a:rPr sz="1300" b="1">
                           <a:solidFill>
                             <a:srgbClr val="FFFFFF"/>
                           </a:solidFill>
@@ -11037,13 +11181,13 @@
                     <a:p>
                       <a:pPr algn="ctr"/>
                       <a:r>
-                        <a:rPr sz="1100" b="1">
+                        <a:rPr sz="1300" b="1">
                           <a:solidFill>
                             <a:srgbClr val="FFFFFF"/>
                           </a:solidFill>
                           <a:latin typeface="Microsoft YaHei"/>
                         </a:rPr>
-                        <a:t>函数/路径</a:t>
+                        <a:t>代表场景</a:t>
                       </a:r>
                     </a:p>
                   </a:txBody>
@@ -11060,7 +11204,7 @@
                     <a:p>
                       <a:pPr algn="ctr"/>
                       <a:r>
-                        <a:rPr sz="1100" b="1">
+                        <a:rPr sz="1300" b="1">
                           <a:solidFill>
                             <a:srgbClr val="FFFFFF"/>
                           </a:solidFill>
@@ -11077,15 +11221,15 @@
                   </a:tcPr>
                 </a:tc>
               </a:tr>
-              <a:tr h="685800">
-                <a:tc>
-                  <a:txBody>
-                    <a:bodyPr/>
-                    <a:lstStyle/>
-                    <a:p>
-                      <a:pPr algn="ctr"/>
-                      <a:r>
-                        <a:rPr sz="1000" b="0">
+              <a:tr h="738051">
+                <a:tc>
+                  <a:txBody>
+                    <a:bodyPr/>
+                    <a:lstStyle/>
+                    <a:p>
+                      <a:pPr algn="ctr"/>
+                      <a:r>
+                        <a:rPr sz="1200" b="0">
                           <a:solidFill>
                             <a:srgbClr val="000000"/>
                           </a:solidFill>
@@ -11108,7 +11252,7 @@
                     <a:p>
                       <a:pPr algn="ctr"/>
                       <a:r>
-                        <a:rPr sz="1000" b="0">
+                        <a:rPr sz="1200" b="0">
                           <a:solidFill>
                             <a:srgbClr val="000000"/>
                           </a:solidFill>
@@ -11131,13 +11275,13 @@
                     <a:p>
                       <a:pPr algn="ctr"/>
                       <a:r>
-                        <a:rPr sz="1000" b="0">
-                          <a:solidFill>
-                            <a:srgbClr val="000000"/>
-                          </a:solidFill>
-                          <a:latin typeface="Microsoft YaHei"/>
-                        </a:rPr>
-                        <a:t>loginCheck(...)</a:t>
+                        <a:rPr sz="1200" b="0">
+                          <a:solidFill>
+                            <a:srgbClr val="000000"/>
+                          </a:solidFill>
+                          <a:latin typeface="Microsoft YaHei"/>
+                        </a:rPr>
+                        <a:t>合法账号与密码</a:t>
                       </a:r>
                     </a:p>
                   </a:txBody>
@@ -11154,7 +11298,7 @@
                     <a:p>
                       <a:pPr algn="ctr"/>
                       <a:r>
-                        <a:rPr sz="1000" b="0">
+                        <a:rPr sz="1200" b="0">
                           <a:solidFill>
                             <a:srgbClr val="000000"/>
                           </a:solidFill>
@@ -11171,15 +11315,15 @@
                   </a:tcPr>
                 </a:tc>
               </a:tr>
-              <a:tr h="685800">
-                <a:tc>
-                  <a:txBody>
-                    <a:bodyPr/>
-                    <a:lstStyle/>
-                    <a:p>
-                      <a:pPr algn="ctr"/>
-                      <a:r>
-                        <a:rPr sz="1000" b="0">
+              <a:tr h="738051">
+                <a:tc>
+                  <a:txBody>
+                    <a:bodyPr/>
+                    <a:lstStyle/>
+                    <a:p>
+                      <a:pPr algn="ctr"/>
+                      <a:r>
+                        <a:rPr sz="1200" b="0">
                           <a:solidFill>
                             <a:srgbClr val="000000"/>
                           </a:solidFill>
@@ -11202,7 +11346,7 @@
                     <a:p>
                       <a:pPr algn="ctr"/>
                       <a:r>
-                        <a:rPr sz="1000" b="0">
+                        <a:rPr sz="1200" b="0">
                           <a:solidFill>
                             <a:srgbClr val="000000"/>
                           </a:solidFill>
@@ -11225,13 +11369,13 @@
                     <a:p>
                       <a:pPr algn="ctr"/>
                       <a:r>
-                        <a:rPr sz="1000" b="0">
-                          <a:solidFill>
-                            <a:srgbClr val="000000"/>
-                          </a:solidFill>
-                          <a:latin typeface="Microsoft YaHei"/>
-                        </a:rPr>
-                        <a:t>loginCheck(... bad pwd)</a:t>
+                        <a:rPr sz="1200" b="0">
+                          <a:solidFill>
+                            <a:srgbClr val="000000"/>
+                          </a:solidFill>
+                          <a:latin typeface="Microsoft YaHei"/>
+                        </a:rPr>
+                        <a:t>错误密码 / 不存在账号</a:t>
                       </a:r>
                     </a:p>
                   </a:txBody>
@@ -11248,7 +11392,7 @@
                     <a:p>
                       <a:pPr algn="ctr"/>
                       <a:r>
-                        <a:rPr sz="1000" b="0">
+                        <a:rPr sz="1200" b="0">
                           <a:solidFill>
                             <a:srgbClr val="000000"/>
                           </a:solidFill>
@@ -11265,15 +11409,15 @@
                   </a:tcPr>
                 </a:tc>
               </a:tr>
-              <a:tr h="685800">
-                <a:tc>
-                  <a:txBody>
-                    <a:bodyPr/>
-                    <a:lstStyle/>
-                    <a:p>
-                      <a:pPr algn="ctr"/>
-                      <a:r>
-                        <a:rPr sz="1000" b="0">
+              <a:tr h="738051">
+                <a:tc>
+                  <a:txBody>
+                    <a:bodyPr/>
+                    <a:lstStyle/>
+                    <a:p>
+                      <a:pPr algn="ctr"/>
+                      <a:r>
+                        <a:rPr sz="1200" b="0">
                           <a:solidFill>
                             <a:srgbClr val="000000"/>
                           </a:solidFill>
@@ -11296,7 +11440,7 @@
                     <a:p>
                       <a:pPr algn="ctr"/>
                       <a:r>
-                        <a:rPr sz="1000" b="0">
+                        <a:rPr sz="1200" b="0">
                           <a:solidFill>
                             <a:srgbClr val="000000"/>
                           </a:solidFill>
@@ -11319,13 +11463,13 @@
                     <a:p>
                       <a:pPr algn="ctr"/>
                       <a:r>
-                        <a:rPr sz="1000" b="0">
-                          <a:solidFill>
-                            <a:srgbClr val="000000"/>
-                          </a:solidFill>
-                          <a:latin typeface="Microsoft YaHei"/>
-                        </a:rPr>
-                        <a:t>registerCheck(...)</a:t>
+                        <a:rPr sz="1200" b="0">
+                          <a:solidFill>
+                            <a:srgbClr val="000000"/>
+                          </a:solidFill>
+                          <a:latin typeface="Microsoft YaHei"/>
+                        </a:rPr>
+                        <a:t>新账号 / 重复账号</a:t>
                       </a:r>
                     </a:p>
                   </a:txBody>
@@ -11342,7 +11486,7 @@
                     <a:p>
                       <a:pPr algn="ctr"/>
                       <a:r>
-                        <a:rPr sz="1000" b="0">
+                        <a:rPr sz="1200" b="0">
                           <a:solidFill>
                             <a:srgbClr val="000000"/>
                           </a:solidFill>
@@ -11359,15 +11503,15 @@
                   </a:tcPr>
                 </a:tc>
               </a:tr>
-              <a:tr h="685800">
-                <a:tc>
-                  <a:txBody>
-                    <a:bodyPr/>
-                    <a:lstStyle/>
-                    <a:p>
-                      <a:pPr algn="ctr"/>
-                      <a:r>
-                        <a:rPr sz="1000" b="0">
+              <a:tr h="738051">
+                <a:tc>
+                  <a:txBody>
+                    <a:bodyPr/>
+                    <a:lstStyle/>
+                    <a:p>
+                      <a:pPr algn="ctr"/>
+                      <a:r>
+                        <a:rPr sz="1200" b="0">
                           <a:solidFill>
                             <a:srgbClr val="000000"/>
                           </a:solidFill>
@@ -11390,7 +11534,7 @@
                     <a:p>
                       <a:pPr algn="ctr"/>
                       <a:r>
-                        <a:rPr sz="1000" b="0">
+                        <a:rPr sz="1200" b="0">
                           <a:solidFill>
                             <a:srgbClr val="000000"/>
                           </a:solidFill>
@@ -11413,13 +11557,13 @@
                     <a:p>
                       <a:pPr algn="ctr"/>
                       <a:r>
-                        <a:rPr sz="1000" b="0">
-                          <a:solidFill>
-                            <a:srgbClr val="000000"/>
-                          </a:solidFill>
-                          <a:latin typeface="Microsoft YaHei"/>
-                        </a:rPr>
-                        <a:t>logout(...)</a:t>
+                        <a:rPr sz="1200" b="0">
+                          <a:solidFill>
+                            <a:srgbClr val="000000"/>
+                          </a:solidFill>
+                          <a:latin typeface="Microsoft YaHei"/>
+                        </a:rPr>
+                        <a:t>清理会话状态</a:t>
                       </a:r>
                     </a:p>
                   </a:txBody>
@@ -11436,13 +11580,13 @@
                     <a:p>
                       <a:pPr algn="ctr"/>
                       <a:r>
-                        <a:rPr sz="1000" b="0">
-                          <a:solidFill>
-                            <a:srgbClr val="000000"/>
-                          </a:solidFill>
-                          <a:latin typeface="Microsoft YaHei"/>
-                        </a:rPr>
-                        <a:t>状态清理</a:t>
+                        <a:rPr sz="1200" b="0">
+                          <a:solidFill>
+                            <a:srgbClr val="000000"/>
+                          </a:solidFill>
+                          <a:latin typeface="Microsoft YaHei"/>
+                        </a:rPr>
+                        <a:t>状态校验</a:t>
                       </a:r>
                     </a:p>
                   </a:txBody>
@@ -11453,15 +11597,15 @@
                   </a:tcPr>
                 </a:tc>
               </a:tr>
-              <a:tr h="685800">
-                <a:tc>
-                  <a:txBody>
-                    <a:bodyPr/>
-                    <a:lstStyle/>
-                    <a:p>
-                      <a:pPr algn="ctr"/>
-                      <a:r>
-                        <a:rPr sz="1000" b="0">
+              <a:tr h="738051">
+                <a:tc>
+                  <a:txBody>
+                    <a:bodyPr/>
+                    <a:lstStyle/>
+                    <a:p>
+                      <a:pPr algn="ctr"/>
+                      <a:r>
+                        <a:rPr sz="1200" b="0">
                           <a:solidFill>
                             <a:srgbClr val="000000"/>
                           </a:solidFill>
@@ -11484,13 +11628,13 @@
                     <a:p>
                       <a:pPr algn="ctr"/>
                       <a:r>
-                        <a:rPr sz="1000" b="0">
-                          <a:solidFill>
-                            <a:srgbClr val="000000"/>
-                          </a:solidFill>
-                          <a:latin typeface="Microsoft YaHei"/>
-                        </a:rPr>
-                        <a:t>管理员增删改</a:t>
+                        <a:rPr sz="1200" b="0">
+                          <a:solidFill>
+                            <a:srgbClr val="000000"/>
+                          </a:solidFill>
+                          <a:latin typeface="Microsoft YaHei"/>
+                        </a:rPr>
+                        <a:t>管理员维护</a:t>
                       </a:r>
                     </a:p>
                   </a:txBody>
@@ -11507,13 +11651,13 @@
                     <a:p>
                       <a:pPr algn="ctr"/>
                       <a:r>
-                        <a:rPr sz="1000" b="0">
-                          <a:solidFill>
-                            <a:srgbClr val="000000"/>
-                          </a:solidFill>
-                          <a:latin typeface="Microsoft YaHei"/>
-                        </a:rPr>
-                        <a:t>admin/user/*</a:t>
+                        <a:rPr sz="1200" b="0">
+                          <a:solidFill>
+                            <a:srgbClr val="000000"/>
+                          </a:solidFill>
+                          <a:latin typeface="Microsoft YaHei"/>
+                        </a:rPr>
+                        <a:t>用户增删改查</a:t>
                       </a:r>
                     </a:p>
                   </a:txBody>
@@ -11530,7 +11674,7 @@
                     <a:p>
                       <a:pPr algn="ctr"/>
                       <a:r>
-                        <a:rPr sz="1000" b="0">
+                        <a:rPr sz="1200" b="0">
                           <a:solidFill>
                             <a:srgbClr val="000000"/>
                           </a:solidFill>
@@ -11547,15 +11691,15 @@
                   </a:tcPr>
                 </a:tc>
               </a:tr>
-              <a:tr h="685800">
-                <a:tc>
-                  <a:txBody>
-                    <a:bodyPr/>
-                    <a:lstStyle/>
-                    <a:p>
-                      <a:pPr algn="ctr"/>
-                      <a:r>
-                        <a:rPr sz="1000" b="0">
+              <a:tr h="738054">
+                <a:tc>
+                  <a:txBody>
+                    <a:bodyPr/>
+                    <a:lstStyle/>
+                    <a:p>
+                      <a:pPr algn="ctr"/>
+                      <a:r>
+                        <a:rPr sz="1200" b="0">
                           <a:solidFill>
                             <a:srgbClr val="000000"/>
                           </a:solidFill>
@@ -11578,13 +11722,13 @@
                     <a:p>
                       <a:pPr algn="ctr"/>
                       <a:r>
-                        <a:rPr sz="1000" b="0">
-                          <a:solidFill>
-                            <a:srgbClr val="000000"/>
-                          </a:solidFill>
-                          <a:latin typeface="Microsoft YaHei"/>
-                        </a:rPr>
-                        <a:t>service 校验</a:t>
+                        <a:rPr sz="1200" b="0">
+                          <a:solidFill>
+                            <a:srgbClr val="000000"/>
+                          </a:solidFill>
+                          <a:latin typeface="Microsoft YaHei"/>
+                        </a:rPr>
+                        <a:t>服务校验</a:t>
                       </a:r>
                     </a:p>
                   </a:txBody>
@@ -11601,13 +11745,13 @@
                     <a:p>
                       <a:pPr algn="ctr"/>
                       <a:r>
-                        <a:rPr sz="1000" b="0">
-                          <a:solidFill>
-                            <a:srgbClr val="000000"/>
-                          </a:solidFill>
-                          <a:latin typeface="Microsoft YaHei"/>
-                        </a:rPr>
-                        <a:t>checkLogin/add/delete/update</a:t>
+                        <a:rPr sz="1200" b="0">
+                          <a:solidFill>
+                            <a:srgbClr val="000000"/>
+                          </a:solidFill>
+                          <a:latin typeface="Microsoft YaHei"/>
+                        </a:rPr>
+                        <a:t>登录、注册、删除、更新</a:t>
                       </a:r>
                     </a:p>
                   </a:txBody>
@@ -11624,7 +11768,7 @@
                     <a:p>
                       <a:pPr algn="ctr"/>
                       <a:r>
-                        <a:rPr sz="1000" b="0">
+                        <a:rPr sz="1200" b="0">
                           <a:solidFill>
                             <a:srgbClr val="000000"/>
                           </a:solidFill>
@@ -12006,8 +12150,8 @@
         </p:nvSpPr>
         <p:spPr>
           <a:xfrm>
-            <a:off x="137160" y="502920"/>
-            <a:ext cx="777240" cy="4206240"/>
+            <a:off x="228600" y="530352"/>
+            <a:ext cx="502920" cy="4709160"/>
           </a:xfrm>
           <a:prstGeom prst="rect">
             <a:avLst/>
@@ -12015,11 +12159,19 @@
           <a:noFill/>
         </p:spPr>
         <p:txBody>
-          <a:bodyPr wrap="none">
-            <a:normAutofit/>
+          <a:bodyPr wrap="none" lIns="0" rIns="0" tIns="0" bIns="0">
+            <a:spAutoFit/>
           </a:bodyPr>
           <a:lstStyle/>
           <a:p>
+            <a:pPr algn="ctr">
+              <a:lnSpc>
+                <a:spcPct val="85000"/>
+              </a:lnSpc>
+              <a:spcAft>
+                <a:spcPts val="0"/>
+              </a:spcAft>
+            </a:pPr>
             <a:r>
               <a:rPr sz="2300" b="1">
                 <a:solidFill>
@@ -12027,56 +12179,98 @@
                 </a:solidFill>
                 <a:latin typeface="Microsoft YaHei"/>
               </a:rPr>
-              <a:t>留言板模块</a:t>
-            </a:r>
-          </a:p>
-        </p:txBody>
-      </p:sp>
-      <p:sp>
-        <p:nvSpPr>
-          <p:cNvPr id="11" name="TextBox 10"/>
-          <p:cNvSpPr txBox="1"/>
-          <p:nvPr/>
-        </p:nvSpPr>
-        <p:spPr>
-          <a:xfrm>
-            <a:off x="1051560" y="411480"/>
-            <a:ext cx="9326880" cy="329184"/>
-          </a:xfrm>
-          <a:prstGeom prst="rect">
-            <a:avLst/>
-          </a:prstGeom>
-          <a:noFill/>
-        </p:spPr>
-        <p:txBody>
-          <a:bodyPr wrap="none">
-            <a:normAutofit/>
-          </a:bodyPr>
-          <a:lstStyle/>
-          <a:p>
-            <a:r>
-              <a:rPr sz="1400" b="0">
+              <a:t>留</a:t>
+            </a:r>
+          </a:p>
+          <a:p>
+            <a:pPr algn="ctr">
+              <a:lnSpc>
+                <a:spcPct val="85000"/>
+              </a:lnSpc>
+              <a:spcAft>
+                <a:spcPts val="0"/>
+              </a:spcAft>
+            </a:pPr>
+            <a:r>
+              <a:rPr sz="2300" b="1">
                 <a:solidFill>
                   <a:srgbClr val="000000"/>
                 </a:solidFill>
                 <a:latin typeface="Microsoft YaHei"/>
               </a:rPr>
-              <a:t>（MessageController.java / AdminMessageController.java / MessageServiceImpl.java）</a:t>
+              <a:t>言</a:t>
+            </a:r>
+          </a:p>
+          <a:p>
+            <a:pPr algn="ctr">
+              <a:lnSpc>
+                <a:spcPct val="85000"/>
+              </a:lnSpc>
+              <a:spcAft>
+                <a:spcPts val="0"/>
+              </a:spcAft>
+            </a:pPr>
+            <a:r>
+              <a:rPr sz="2300" b="1">
+                <a:solidFill>
+                  <a:srgbClr val="000000"/>
+                </a:solidFill>
+                <a:latin typeface="Microsoft YaHei"/>
+              </a:rPr>
+              <a:t>板</a:t>
+            </a:r>
+          </a:p>
+          <a:p>
+            <a:pPr algn="ctr">
+              <a:lnSpc>
+                <a:spcPct val="85000"/>
+              </a:lnSpc>
+              <a:spcAft>
+                <a:spcPts val="0"/>
+              </a:spcAft>
+            </a:pPr>
+            <a:r>
+              <a:rPr sz="2300" b="1">
+                <a:solidFill>
+                  <a:srgbClr val="000000"/>
+                </a:solidFill>
+                <a:latin typeface="Microsoft YaHei"/>
+              </a:rPr>
+              <a:t>模</a:t>
+            </a:r>
+          </a:p>
+          <a:p>
+            <a:pPr algn="ctr">
+              <a:lnSpc>
+                <a:spcPct val="85000"/>
+              </a:lnSpc>
+              <a:spcAft>
+                <a:spcPts val="0"/>
+              </a:spcAft>
+            </a:pPr>
+            <a:r>
+              <a:rPr sz="2300" b="1">
+                <a:solidFill>
+                  <a:srgbClr val="000000"/>
+                </a:solidFill>
+                <a:latin typeface="Microsoft YaHei"/>
+              </a:rPr>
+              <a:t>块</a:t>
             </a:r>
           </a:p>
         </p:txBody>
       </p:sp>
       <p:graphicFrame>
         <p:nvGraphicFramePr>
-          <p:cNvPr id="12" name="Table 11"/>
+          <p:cNvPr id="11" name="Table 10"/>
           <p:cNvGraphicFramePr>
             <a:graphicFrameLocks noGrp="1"/>
           </p:cNvGraphicFramePr>
           <p:nvPr/>
         </p:nvGraphicFramePr>
         <p:xfrm>
-          <a:off x="1051560" y="960120"/>
-          <a:ext cx="10607040" cy="4800600"/>
+          <a:off x="960120" y="896112"/>
+          <a:ext cx="10652760" cy="5166360"/>
         </p:xfrm>
         <a:graphic>
           <a:graphicData uri="http://schemas.openxmlformats.org/drawingml/2006/table">
@@ -12085,20 +12279,20 @@
                 <a:tableStyleId>{5C22544A-7EE6-4342-B048-85BDC9FD1C3A}</a:tableStyleId>
               </a:tblPr>
               <a:tblGrid>
-                <a:gridCol w="2651760"/>
-                <a:gridCol w="2651760"/>
-                <a:gridCol w="2651760"/>
-                <a:gridCol w="2651760"/>
+                <a:gridCol w="2663190"/>
+                <a:gridCol w="2663190"/>
+                <a:gridCol w="2663190"/>
+                <a:gridCol w="2663190"/>
               </a:tblGrid>
-              <a:tr h="685800">
-                <a:tc>
-                  <a:txBody>
-                    <a:bodyPr/>
-                    <a:lstStyle/>
-                    <a:p>
-                      <a:pPr algn="ctr"/>
-                      <a:r>
-                        <a:rPr sz="1100" b="1">
+              <a:tr h="738051">
+                <a:tc>
+                  <a:txBody>
+                    <a:bodyPr/>
+                    <a:lstStyle/>
+                    <a:p>
+                      <a:pPr algn="ctr"/>
+                      <a:r>
+                        <a:rPr sz="1300" b="1">
                           <a:solidFill>
                             <a:srgbClr val="FFFFFF"/>
                           </a:solidFill>
@@ -12121,7 +12315,7 @@
                     <a:p>
                       <a:pPr algn="ctr"/>
                       <a:r>
-                        <a:rPr sz="1100" b="1">
+                        <a:rPr sz="1300" b="1">
                           <a:solidFill>
                             <a:srgbClr val="FFFFFF"/>
                           </a:solidFill>
@@ -12144,13 +12338,13 @@
                     <a:p>
                       <a:pPr algn="ctr"/>
                       <a:r>
-                        <a:rPr sz="1100" b="1">
+                        <a:rPr sz="1300" b="1">
                           <a:solidFill>
                             <a:srgbClr val="FFFFFF"/>
                           </a:solidFill>
                           <a:latin typeface="Microsoft YaHei"/>
                         </a:rPr>
-                        <a:t>函数/路径</a:t>
+                        <a:t>代表场景</a:t>
                       </a:r>
                     </a:p>
                   </a:txBody>
@@ -12167,7 +12361,7 @@
                     <a:p>
                       <a:pPr algn="ctr"/>
                       <a:r>
-                        <a:rPr sz="1100" b="1">
+                        <a:rPr sz="1300" b="1">
                           <a:solidFill>
                             <a:srgbClr val="FFFFFF"/>
                           </a:solidFill>
@@ -12184,15 +12378,15 @@
                   </a:tcPr>
                 </a:tc>
               </a:tr>
-              <a:tr h="685800">
-                <a:tc>
-                  <a:txBody>
-                    <a:bodyPr/>
-                    <a:lstStyle/>
-                    <a:p>
-                      <a:pPr algn="ctr"/>
-                      <a:r>
-                        <a:rPr sz="1000" b="0">
+              <a:tr h="738051">
+                <a:tc>
+                  <a:txBody>
+                    <a:bodyPr/>
+                    <a:lstStyle/>
+                    <a:p>
+                      <a:pPr algn="ctr"/>
+                      <a:r>
+                        <a:rPr sz="1200" b="0">
                           <a:solidFill>
                             <a:srgbClr val="000000"/>
                           </a:solidFill>
@@ -12215,7 +12409,7 @@
                     <a:p>
                       <a:pPr algn="ctr"/>
                       <a:r>
-                        <a:rPr sz="1000" b="0">
+                        <a:rPr sz="1200" b="0">
                           <a:solidFill>
                             <a:srgbClr val="000000"/>
                           </a:solidFill>
@@ -12238,13 +12432,13 @@
                     <a:p>
                       <a:pPr algn="ctr"/>
                       <a:r>
-                        <a:rPr sz="1000" b="0">
-                          <a:solidFill>
-                            <a:srgbClr val="000000"/>
-                          </a:solidFill>
-                          <a:latin typeface="Microsoft YaHei"/>
-                        </a:rPr>
-                        <a:t>message_list(... page ...)</a:t>
+                        <a:rPr sz="1200" b="0">
+                          <a:solidFill>
+                            <a:srgbClr val="000000"/>
+                          </a:solidFill>
+                          <a:latin typeface="Microsoft YaHei"/>
+                        </a:rPr>
+                        <a:t>分页查看留言</a:t>
                       </a:r>
                     </a:p>
                   </a:txBody>
@@ -12261,7 +12455,7 @@
                     <a:p>
                       <a:pPr algn="ctr"/>
                       <a:r>
-                        <a:rPr sz="1000" b="0">
+                        <a:rPr sz="1200" b="0">
                           <a:solidFill>
                             <a:srgbClr val="000000"/>
                           </a:solidFill>
@@ -12278,15 +12472,15 @@
                   </a:tcPr>
                 </a:tc>
               </a:tr>
-              <a:tr h="685800">
-                <a:tc>
-                  <a:txBody>
-                    <a:bodyPr/>
-                    <a:lstStyle/>
-                    <a:p>
-                      <a:pPr algn="ctr"/>
-                      <a:r>
-                        <a:rPr sz="1000" b="0">
+              <a:tr h="738051">
+                <a:tc>
+                  <a:txBody>
+                    <a:bodyPr/>
+                    <a:lstStyle/>
+                    <a:p>
+                      <a:pPr algn="ctr"/>
+                      <a:r>
+                        <a:rPr sz="1200" b="0">
                           <a:solidFill>
                             <a:srgbClr val="000000"/>
                           </a:solidFill>
@@ -12309,7 +12503,7 @@
                     <a:p>
                       <a:pPr algn="ctr"/>
                       <a:r>
-                        <a:rPr sz="1000" b="0">
+                        <a:rPr sz="1200" b="0">
                           <a:solidFill>
                             <a:srgbClr val="000000"/>
                           </a:solidFill>
@@ -12332,13 +12526,13 @@
                     <a:p>
                       <a:pPr algn="ctr"/>
                       <a:r>
-                        <a:rPr sz="1000" b="0">
-                          <a:solidFill>
-                            <a:srgbClr val="000000"/>
-                          </a:solidFill>
-                          <a:latin typeface="Microsoft YaHei"/>
-                        </a:rPr>
-                        <a:t>message_add(...)</a:t>
+                        <a:rPr sz="1200" b="0">
+                          <a:solidFill>
+                            <a:srgbClr val="000000"/>
+                          </a:solidFill>
+                          <a:latin typeface="Microsoft YaHei"/>
+                        </a:rPr>
+                        <a:t>登录用户发布有效内容</a:t>
                       </a:r>
                     </a:p>
                   </a:txBody>
@@ -12355,7 +12549,7 @@
                     <a:p>
                       <a:pPr algn="ctr"/>
                       <a:r>
-                        <a:rPr sz="1000" b="0">
+                        <a:rPr sz="1200" b="0">
                           <a:solidFill>
                             <a:srgbClr val="000000"/>
                           </a:solidFill>
@@ -12372,15 +12566,15 @@
                   </a:tcPr>
                 </a:tc>
               </a:tr>
-              <a:tr h="685800">
-                <a:tc>
-                  <a:txBody>
-                    <a:bodyPr/>
-                    <a:lstStyle/>
-                    <a:p>
-                      <a:pPr algn="ctr"/>
-                      <a:r>
-                        <a:rPr sz="1000" b="0">
+              <a:tr h="738051">
+                <a:tc>
+                  <a:txBody>
+                    <a:bodyPr/>
+                    <a:lstStyle/>
+                    <a:p>
+                      <a:pPr algn="ctr"/>
+                      <a:r>
+                        <a:rPr sz="1200" b="0">
                           <a:solidFill>
                             <a:srgbClr val="000000"/>
                           </a:solidFill>
@@ -12403,7 +12597,7 @@
                     <a:p>
                       <a:pPr algn="ctr"/>
                       <a:r>
-                        <a:rPr sz="1000" b="0">
+                        <a:rPr sz="1200" b="0">
                           <a:solidFill>
                             <a:srgbClr val="000000"/>
                           </a:solidFill>
@@ -12426,13 +12620,13 @@
                     <a:p>
                       <a:pPr algn="ctr"/>
                       <a:r>
-                        <a:rPr sz="1000" b="0">
-                          <a:solidFill>
-                            <a:srgbClr val="000000"/>
-                          </a:solidFill>
-                          <a:latin typeface="Microsoft YaHei"/>
-                        </a:rPr>
-                        <a:t>message_add(empty)</a:t>
+                        <a:rPr sz="1200" b="0">
+                          <a:solidFill>
+                            <a:srgbClr val="000000"/>
+                          </a:solidFill>
+                          <a:latin typeface="Microsoft YaHei"/>
+                        </a:rPr>
+                        <a:t>空内容 / 缺少参数</a:t>
                       </a:r>
                     </a:p>
                   </a:txBody>
@@ -12449,7 +12643,7 @@
                     <a:p>
                       <a:pPr algn="ctr"/>
                       <a:r>
-                        <a:rPr sz="1000" b="0">
+                        <a:rPr sz="1200" b="0">
                           <a:solidFill>
                             <a:srgbClr val="000000"/>
                           </a:solidFill>
@@ -12466,15 +12660,15 @@
                   </a:tcPr>
                 </a:tc>
               </a:tr>
-              <a:tr h="685800">
-                <a:tc>
-                  <a:txBody>
-                    <a:bodyPr/>
-                    <a:lstStyle/>
-                    <a:p>
-                      <a:pPr algn="ctr"/>
-                      <a:r>
-                        <a:rPr sz="1000" b="0">
+              <a:tr h="738051">
+                <a:tc>
+                  <a:txBody>
+                    <a:bodyPr/>
+                    <a:lstStyle/>
+                    <a:p>
+                      <a:pPr algn="ctr"/>
+                      <a:r>
+                        <a:rPr sz="1200" b="0">
                           <a:solidFill>
                             <a:srgbClr val="000000"/>
                           </a:solidFill>
@@ -12497,7 +12691,7 @@
                     <a:p>
                       <a:pPr algn="ctr"/>
                       <a:r>
-                        <a:rPr sz="1000" b="0">
+                        <a:rPr sz="1200" b="0">
                           <a:solidFill>
                             <a:srgbClr val="000000"/>
                           </a:solidFill>
@@ -12520,13 +12714,13 @@
                     <a:p>
                       <a:pPr algn="ctr"/>
                       <a:r>
-                        <a:rPr sz="1000" b="0">
-                          <a:solidFill>
-                            <a:srgbClr val="000000"/>
-                          </a:solidFill>
-                          <a:latin typeface="Microsoft YaHei"/>
-                        </a:rPr>
-                        <a:t>message_delete(...)</a:t>
+                        <a:rPr sz="1200" b="0">
+                          <a:solidFill>
+                            <a:srgbClr val="000000"/>
+                          </a:solidFill>
+                          <a:latin typeface="Microsoft YaHei"/>
+                        </a:rPr>
+                        <a:t>本人删除 / 非法删除</a:t>
                       </a:r>
                     </a:p>
                   </a:txBody>
@@ -12543,7 +12737,7 @@
                     <a:p>
                       <a:pPr algn="ctr"/>
                       <a:r>
-                        <a:rPr sz="1000" b="0">
+                        <a:rPr sz="1200" b="0">
                           <a:solidFill>
                             <a:srgbClr val="000000"/>
                           </a:solidFill>
@@ -12560,15 +12754,15 @@
                   </a:tcPr>
                 </a:tc>
               </a:tr>
-              <a:tr h="685800">
-                <a:tc>
-                  <a:txBody>
-                    <a:bodyPr/>
-                    <a:lstStyle/>
-                    <a:p>
-                      <a:pPr algn="ctr"/>
-                      <a:r>
-                        <a:rPr sz="1000" b="0">
+              <a:tr h="738051">
+                <a:tc>
+                  <a:txBody>
+                    <a:bodyPr/>
+                    <a:lstStyle/>
+                    <a:p>
+                      <a:pPr algn="ctr"/>
+                      <a:r>
+                        <a:rPr sz="1200" b="0">
                           <a:solidFill>
                             <a:srgbClr val="000000"/>
                           </a:solidFill>
@@ -12591,7 +12785,7 @@
                     <a:p>
                       <a:pPr algn="ctr"/>
                       <a:r>
-                        <a:rPr sz="1000" b="0">
+                        <a:rPr sz="1200" b="0">
                           <a:solidFill>
                             <a:srgbClr val="000000"/>
                           </a:solidFill>
@@ -12614,13 +12808,13 @@
                     <a:p>
                       <a:pPr algn="ctr"/>
                       <a:r>
-                        <a:rPr sz="1000" b="0">
-                          <a:solidFill>
-                            <a:srgbClr val="000000"/>
-                          </a:solidFill>
-                          <a:latin typeface="Microsoft YaHei"/>
-                        </a:rPr>
-                        <a:t>message_check(... state ...)</a:t>
+                        <a:rPr sz="1200" b="0">
+                          <a:solidFill>
+                            <a:srgbClr val="000000"/>
+                          </a:solidFill>
+                          <a:latin typeface="Microsoft YaHei"/>
+                        </a:rPr>
+                        <a:t>通过 / 拒绝留言</a:t>
                       </a:r>
                     </a:p>
                   </a:txBody>
@@ -12637,7 +12831,7 @@
                     <a:p>
                       <a:pPr algn="ctr"/>
                       <a:r>
-                        <a:rPr sz="1000" b="0">
+                        <a:rPr sz="1200" b="0">
                           <a:solidFill>
                             <a:srgbClr val="000000"/>
                           </a:solidFill>
@@ -12654,15 +12848,15 @@
                   </a:tcPr>
                 </a:tc>
               </a:tr>
-              <a:tr h="685800">
-                <a:tc>
-                  <a:txBody>
-                    <a:bodyPr/>
-                    <a:lstStyle/>
-                    <a:p>
-                      <a:pPr algn="ctr"/>
-                      <a:r>
-                        <a:rPr sz="1000" b="0">
+              <a:tr h="738054">
+                <a:tc>
+                  <a:txBody>
+                    <a:bodyPr/>
+                    <a:lstStyle/>
+                    <a:p>
+                      <a:pPr algn="ctr"/>
+                      <a:r>
+                        <a:rPr sz="1200" b="0">
                           <a:solidFill>
                             <a:srgbClr val="000000"/>
                           </a:solidFill>
@@ -12685,13 +12879,13 @@
                     <a:p>
                       <a:pPr algn="ctr"/>
                       <a:r>
-                        <a:rPr sz="1000" b="0">
-                          <a:solidFill>
-                            <a:srgbClr val="000000"/>
-                          </a:solidFill>
-                          <a:latin typeface="Microsoft YaHei"/>
-                        </a:rPr>
-                        <a:t>VO 查询</a:t>
+                        <a:rPr sz="1200" b="0">
+                          <a:solidFill>
+                            <a:srgbClr val="000000"/>
+                          </a:solidFill>
+                          <a:latin typeface="Microsoft YaHei"/>
+                        </a:rPr>
+                        <a:t>聚合查询</a:t>
                       </a:r>
                     </a:p>
                   </a:txBody>
@@ -12708,13 +12902,13 @@
                     <a:p>
                       <a:pPr algn="ctr"/>
                       <a:r>
-                        <a:rPr sz="1000" b="0">
-                          <a:solidFill>
-                            <a:srgbClr val="000000"/>
-                          </a:solidFill>
-                          <a:latin typeface="Microsoft YaHei"/>
-                        </a:rPr>
-                        <a:t>MessageVoServiceImpl</a:t>
+                        <a:rPr sz="1200" b="0">
+                          <a:solidFill>
+                            <a:srgbClr val="000000"/>
+                          </a:solidFill>
+                          <a:latin typeface="Microsoft YaHei"/>
+                        </a:rPr>
+                        <a:t>留言与用户信息组合</a:t>
                       </a:r>
                     </a:p>
                   </a:txBody>
@@ -12731,7 +12925,7 @@
                     <a:p>
                       <a:pPr algn="ctr"/>
                       <a:r>
-                        <a:rPr sz="1000" b="0">
+                        <a:rPr sz="1200" b="0">
                           <a:solidFill>
                             <a:srgbClr val="000000"/>
                           </a:solidFill>
@@ -13656,8 +13850,8 @@
         </p:nvSpPr>
         <p:spPr>
           <a:xfrm>
-            <a:off x="137160" y="384048"/>
-            <a:ext cx="777240" cy="5212080"/>
+            <a:off x="228600" y="530352"/>
+            <a:ext cx="502920" cy="4709160"/>
           </a:xfrm>
           <a:prstGeom prst="rect">
             <a:avLst/>
@@ -13665,68 +13859,137 @@
           <a:noFill/>
         </p:spPr>
         <p:txBody>
-          <a:bodyPr wrap="none">
-            <a:normAutofit/>
+          <a:bodyPr wrap="none" lIns="0" rIns="0" tIns="0" bIns="0">
+            <a:spAutoFit/>
           </a:bodyPr>
           <a:lstStyle/>
           <a:p>
-            <a:r>
-              <a:rPr sz="2100" b="1">
+            <a:pPr algn="ctr">
+              <a:lnSpc>
+                <a:spcPct val="85000"/>
+              </a:lnSpc>
+              <a:spcAft>
+                <a:spcPts val="0"/>
+              </a:spcAft>
+            </a:pPr>
+            <a:r>
+              <a:rPr sz="2200" b="1">
                 <a:solidFill>
                   <a:srgbClr val="000000"/>
                 </a:solidFill>
                 <a:latin typeface="Microsoft YaHei"/>
               </a:rPr>
-              <a:t>后台管理与新闻模块</a:t>
-            </a:r>
-          </a:p>
-        </p:txBody>
-      </p:sp>
-      <p:sp>
-        <p:nvSpPr>
-          <p:cNvPr id="11" name="TextBox 10"/>
-          <p:cNvSpPr txBox="1"/>
-          <p:nvPr/>
-        </p:nvSpPr>
-        <p:spPr>
-          <a:xfrm>
-            <a:off x="1051560" y="411480"/>
-            <a:ext cx="9326880" cy="329184"/>
-          </a:xfrm>
-          <a:prstGeom prst="rect">
-            <a:avLst/>
-          </a:prstGeom>
-          <a:noFill/>
-        </p:spPr>
-        <p:txBody>
-          <a:bodyPr wrap="none">
-            <a:normAutofit/>
-          </a:bodyPr>
-          <a:lstStyle/>
-          <a:p>
-            <a:r>
-              <a:rPr sz="1400" b="0">
+              <a:t>后</a:t>
+            </a:r>
+          </a:p>
+          <a:p>
+            <a:pPr algn="ctr">
+              <a:lnSpc>
+                <a:spcPct val="85000"/>
+              </a:lnSpc>
+              <a:spcAft>
+                <a:spcPts val="0"/>
+              </a:spcAft>
+            </a:pPr>
+            <a:r>
+              <a:rPr sz="2200" b="1">
                 <a:solidFill>
                   <a:srgbClr val="000000"/>
                 </a:solidFill>
                 <a:latin typeface="Microsoft YaHei"/>
               </a:rPr>
-              <a:t>（AdminVenueController.java / AdminNewsController.java / AdminUserController.java）</a:t>
+              <a:t>台</a:t>
+            </a:r>
+          </a:p>
+          <a:p>
+            <a:pPr algn="ctr">
+              <a:lnSpc>
+                <a:spcPct val="85000"/>
+              </a:lnSpc>
+              <a:spcAft>
+                <a:spcPts val="0"/>
+              </a:spcAft>
+            </a:pPr>
+            <a:r>
+              <a:rPr sz="2200" b="1">
+                <a:solidFill>
+                  <a:srgbClr val="000000"/>
+                </a:solidFill>
+                <a:latin typeface="Microsoft YaHei"/>
+              </a:rPr>
+              <a:t>管</a:t>
+            </a:r>
+          </a:p>
+          <a:p>
+            <a:pPr algn="ctr">
+              <a:lnSpc>
+                <a:spcPct val="85000"/>
+              </a:lnSpc>
+              <a:spcAft>
+                <a:spcPts val="0"/>
+              </a:spcAft>
+            </a:pPr>
+            <a:r>
+              <a:rPr sz="2200" b="1">
+                <a:solidFill>
+                  <a:srgbClr val="000000"/>
+                </a:solidFill>
+                <a:latin typeface="Microsoft YaHei"/>
+              </a:rPr>
+              <a:t>理</a:t>
+            </a:r>
+          </a:p>
+          <a:p>
+            <a:pPr algn="ctr">
+              <a:lnSpc>
+                <a:spcPct val="85000"/>
+              </a:lnSpc>
+              <a:spcAft>
+                <a:spcPts val="0"/>
+              </a:spcAft>
+            </a:pPr>
+            <a:r>
+              <a:rPr sz="2200" b="1">
+                <a:solidFill>
+                  <a:srgbClr val="000000"/>
+                </a:solidFill>
+                <a:latin typeface="Microsoft YaHei"/>
+              </a:rPr>
+              <a:t>模</a:t>
+            </a:r>
+          </a:p>
+          <a:p>
+            <a:pPr algn="ctr">
+              <a:lnSpc>
+                <a:spcPct val="85000"/>
+              </a:lnSpc>
+              <a:spcAft>
+                <a:spcPts val="0"/>
+              </a:spcAft>
+            </a:pPr>
+            <a:r>
+              <a:rPr sz="2200" b="1">
+                <a:solidFill>
+                  <a:srgbClr val="000000"/>
+                </a:solidFill>
+                <a:latin typeface="Microsoft YaHei"/>
+              </a:rPr>
+              <a:t>块</a:t>
             </a:r>
           </a:p>
         </p:txBody>
       </p:sp>
       <p:graphicFrame>
         <p:nvGraphicFramePr>
-          <p:cNvPr id="12" name="Table 11"/>
+          <p:cNvPr id="11" name="Table 10"/>
           <p:cNvGraphicFramePr>
             <a:graphicFrameLocks noGrp="1"/>
           </p:cNvGraphicFramePr>
           <p:nvPr/>
         </p:nvGraphicFramePr>
         <p:xfrm>
-          <a:off x="1051560" y="960120"/>
-          <a:ext cx="10607040" cy="4800600"/>
+          <a:off x="960120" y="896112"/>
+          <a:ext cx="10652760" cy="5166360"/>
         </p:xfrm>
         <a:graphic>
           <a:graphicData uri="http://schemas.openxmlformats.org/drawingml/2006/table">
@@ -13735,20 +13998,20 @@
                 <a:tableStyleId>{5C22544A-7EE6-4342-B048-85BDC9FD1C3A}</a:tableStyleId>
               </a:tblPr>
               <a:tblGrid>
-                <a:gridCol w="2651760"/>
-                <a:gridCol w="2651760"/>
-                <a:gridCol w="2651760"/>
-                <a:gridCol w="2651760"/>
+                <a:gridCol w="2663190"/>
+                <a:gridCol w="2663190"/>
+                <a:gridCol w="2663190"/>
+                <a:gridCol w="2663190"/>
               </a:tblGrid>
-              <a:tr h="685800">
-                <a:tc>
-                  <a:txBody>
-                    <a:bodyPr/>
-                    <a:lstStyle/>
-                    <a:p>
-                      <a:pPr algn="ctr"/>
-                      <a:r>
-                        <a:rPr sz="1100" b="1">
+              <a:tr h="738051">
+                <a:tc>
+                  <a:txBody>
+                    <a:bodyPr/>
+                    <a:lstStyle/>
+                    <a:p>
+                      <a:pPr algn="ctr"/>
+                      <a:r>
+                        <a:rPr sz="1300" b="1">
                           <a:solidFill>
                             <a:srgbClr val="FFFFFF"/>
                           </a:solidFill>
@@ -13771,7 +14034,7 @@
                     <a:p>
                       <a:pPr algn="ctr"/>
                       <a:r>
-                        <a:rPr sz="1100" b="1">
+                        <a:rPr sz="1300" b="1">
                           <a:solidFill>
                             <a:srgbClr val="FFFFFF"/>
                           </a:solidFill>
@@ -13794,13 +14057,13 @@
                     <a:p>
                       <a:pPr algn="ctr"/>
                       <a:r>
-                        <a:rPr sz="1100" b="1">
+                        <a:rPr sz="1300" b="1">
                           <a:solidFill>
                             <a:srgbClr val="FFFFFF"/>
                           </a:solidFill>
                           <a:latin typeface="Microsoft YaHei"/>
                         </a:rPr>
-                        <a:t>函数/路径</a:t>
+                        <a:t>代表场景</a:t>
                       </a:r>
                     </a:p>
                   </a:txBody>
@@ -13817,7 +14080,7 @@
                     <a:p>
                       <a:pPr algn="ctr"/>
                       <a:r>
-                        <a:rPr sz="1100" b="1">
+                        <a:rPr sz="1300" b="1">
                           <a:solidFill>
                             <a:srgbClr val="FFFFFF"/>
                           </a:solidFill>
@@ -13834,15 +14097,15 @@
                   </a:tcPr>
                 </a:tc>
               </a:tr>
-              <a:tr h="685800">
-                <a:tc>
-                  <a:txBody>
-                    <a:bodyPr/>
-                    <a:lstStyle/>
-                    <a:p>
-                      <a:pPr algn="ctr"/>
-                      <a:r>
-                        <a:rPr sz="1000" b="0">
+              <a:tr h="738051">
+                <a:tc>
+                  <a:txBody>
+                    <a:bodyPr/>
+                    <a:lstStyle/>
+                    <a:p>
+                      <a:pPr algn="ctr"/>
+                      <a:r>
+                        <a:rPr sz="1200" b="0">
                           <a:solidFill>
                             <a:srgbClr val="000000"/>
                           </a:solidFill>
@@ -13865,7 +14128,7 @@
                     <a:p>
                       <a:pPr algn="ctr"/>
                       <a:r>
-                        <a:rPr sz="1000" b="0">
+                        <a:rPr sz="1200" b="0">
                           <a:solidFill>
                             <a:srgbClr val="000000"/>
                           </a:solidFill>
@@ -13888,13 +14151,13 @@
                     <a:p>
                       <a:pPr algn="ctr"/>
                       <a:r>
-                        <a:rPr sz="1000" b="0">
-                          <a:solidFill>
-                            <a:srgbClr val="000000"/>
-                          </a:solidFill>
-                          <a:latin typeface="Microsoft YaHei"/>
-                        </a:rPr>
-                        <a:t>venue_add / venue_update</a:t>
+                        <a:rPr sz="1200" b="0">
+                          <a:solidFill>
+                            <a:srgbClr val="000000"/>
+                          </a:solidFill>
+                          <a:latin typeface="Microsoft YaHei"/>
+                        </a:rPr>
+                        <a:t>合法数据 / 边界价格</a:t>
                       </a:r>
                     </a:p>
                   </a:txBody>
@@ -13911,13 +14174,13 @@
                     <a:p>
                       <a:pPr algn="ctr"/>
                       <a:r>
-                        <a:rPr sz="1000" b="0">
-                          <a:solidFill>
-                            <a:srgbClr val="000000"/>
-                          </a:solidFill>
-                          <a:latin typeface="Microsoft YaHei"/>
-                        </a:rPr>
-                        <a:t>有效类 + 边界价格</a:t>
+                        <a:rPr sz="1200" b="0">
+                          <a:solidFill>
+                            <a:srgbClr val="000000"/>
+                          </a:solidFill>
+                          <a:latin typeface="Microsoft YaHei"/>
+                        </a:rPr>
+                        <a:t>有效类 + 边界值</a:t>
                       </a:r>
                     </a:p>
                   </a:txBody>
@@ -13928,15 +14191,15 @@
                   </a:tcPr>
                 </a:tc>
               </a:tr>
-              <a:tr h="685800">
-                <a:tc>
-                  <a:txBody>
-                    <a:bodyPr/>
-                    <a:lstStyle/>
-                    <a:p>
-                      <a:pPr algn="ctr"/>
-                      <a:r>
-                        <a:rPr sz="1000" b="0">
+              <a:tr h="738051">
+                <a:tc>
+                  <a:txBody>
+                    <a:bodyPr/>
+                    <a:lstStyle/>
+                    <a:p>
+                      <a:pPr algn="ctr"/>
+                      <a:r>
+                        <a:rPr sz="1200" b="0">
                           <a:solidFill>
                             <a:srgbClr val="000000"/>
                           </a:solidFill>
@@ -13959,7 +14222,7 @@
                     <a:p>
                       <a:pPr algn="ctr"/>
                       <a:r>
-                        <a:rPr sz="1000" b="0">
+                        <a:rPr sz="1200" b="0">
                           <a:solidFill>
                             <a:srgbClr val="000000"/>
                           </a:solidFill>
@@ -13982,13 +14245,13 @@
                     <a:p>
                       <a:pPr algn="ctr"/>
                       <a:r>
-                        <a:rPr sz="1000" b="0">
-                          <a:solidFill>
-                            <a:srgbClr val="000000"/>
-                          </a:solidFill>
-                          <a:latin typeface="Microsoft YaHei"/>
-                        </a:rPr>
-                        <a:t>venue_delete</a:t>
+                        <a:rPr sz="1200" b="0">
+                          <a:solidFill>
+                            <a:srgbClr val="000000"/>
+                          </a:solidFill>
+                          <a:latin typeface="Microsoft YaHei"/>
+                        </a:rPr>
+                        <a:t>存在 ID / 不存在 ID</a:t>
                       </a:r>
                     </a:p>
                   </a:txBody>
@@ -14005,13 +14268,13 @@
                     <a:p>
                       <a:pPr algn="ctr"/>
                       <a:r>
-                        <a:rPr sz="1000" b="0">
-                          <a:solidFill>
-                            <a:srgbClr val="000000"/>
-                          </a:solidFill>
-                          <a:latin typeface="Microsoft YaHei"/>
-                        </a:rPr>
-                        <a:t>存在/不存在 ID</a:t>
+                        <a:rPr sz="1200" b="0">
+                          <a:solidFill>
+                            <a:srgbClr val="000000"/>
+                          </a:solidFill>
+                          <a:latin typeface="Microsoft YaHei"/>
+                        </a:rPr>
+                        <a:t>异常路径</a:t>
                       </a:r>
                     </a:p>
                   </a:txBody>
@@ -14022,15 +14285,15 @@
                   </a:tcPr>
                 </a:tc>
               </a:tr>
-              <a:tr h="685800">
-                <a:tc>
-                  <a:txBody>
-                    <a:bodyPr/>
-                    <a:lstStyle/>
-                    <a:p>
-                      <a:pPr algn="ctr"/>
-                      <a:r>
-                        <a:rPr sz="1000" b="0">
+              <a:tr h="738051">
+                <a:tc>
+                  <a:txBody>
+                    <a:bodyPr/>
+                    <a:lstStyle/>
+                    <a:p>
+                      <a:pPr algn="ctr"/>
+                      <a:r>
+                        <a:rPr sz="1200" b="0">
                           <a:solidFill>
                             <a:srgbClr val="000000"/>
                           </a:solidFill>
@@ -14053,7 +14316,7 @@
                     <a:p>
                       <a:pPr algn="ctr"/>
                       <a:r>
-                        <a:rPr sz="1000" b="0">
+                        <a:rPr sz="1200" b="0">
                           <a:solidFill>
                             <a:srgbClr val="000000"/>
                           </a:solidFill>
@@ -14076,13 +14339,13 @@
                     <a:p>
                       <a:pPr algn="ctr"/>
                       <a:r>
-                        <a:rPr sz="1000" b="0">
-                          <a:solidFill>
-                            <a:srgbClr val="000000"/>
-                          </a:solidFill>
-                          <a:latin typeface="Microsoft YaHei"/>
-                        </a:rPr>
-                        <a:t>news_add / news_update</a:t>
+                        <a:rPr sz="1200" b="0">
+                          <a:solidFill>
+                            <a:srgbClr val="000000"/>
+                          </a:solidFill>
+                          <a:latin typeface="Microsoft YaHei"/>
+                        </a:rPr>
+                        <a:t>空标题 / 有效内容</a:t>
                       </a:r>
                     </a:p>
                   </a:txBody>
@@ -14099,13 +14362,13 @@
                     <a:p>
                       <a:pPr algn="ctr"/>
                       <a:r>
-                        <a:rPr sz="1000" b="0">
-                          <a:solidFill>
-                            <a:srgbClr val="000000"/>
-                          </a:solidFill>
-                          <a:latin typeface="Microsoft YaHei"/>
-                        </a:rPr>
-                        <a:t>空标题/有效内容</a:t>
+                        <a:rPr sz="1200" b="0">
+                          <a:solidFill>
+                            <a:srgbClr val="000000"/>
+                          </a:solidFill>
+                          <a:latin typeface="Microsoft YaHei"/>
+                        </a:rPr>
+                        <a:t>无效类 + 有效类</a:t>
                       </a:r>
                     </a:p>
                   </a:txBody>
@@ -14116,15 +14379,15 @@
                   </a:tcPr>
                 </a:tc>
               </a:tr>
-              <a:tr h="685800">
-                <a:tc>
-                  <a:txBody>
-                    <a:bodyPr/>
-                    <a:lstStyle/>
-                    <a:p>
-                      <a:pPr algn="ctr"/>
-                      <a:r>
-                        <a:rPr sz="1000" b="0">
+              <a:tr h="738051">
+                <a:tc>
+                  <a:txBody>
+                    <a:bodyPr/>
+                    <a:lstStyle/>
+                    <a:p>
+                      <a:pPr algn="ctr"/>
+                      <a:r>
+                        <a:rPr sz="1200" b="0">
                           <a:solidFill>
                             <a:srgbClr val="000000"/>
                           </a:solidFill>
@@ -14147,7 +14410,7 @@
                     <a:p>
                       <a:pPr algn="ctr"/>
                       <a:r>
-                        <a:rPr sz="1000" b="0">
+                        <a:rPr sz="1200" b="0">
                           <a:solidFill>
                             <a:srgbClr val="000000"/>
                           </a:solidFill>
@@ -14170,13 +14433,13 @@
                     <a:p>
                       <a:pPr algn="ctr"/>
                       <a:r>
-                        <a:rPr sz="1000" b="0">
-                          <a:solidFill>
-                            <a:srgbClr val="000000"/>
-                          </a:solidFill>
-                          <a:latin typeface="Microsoft YaHei"/>
-                        </a:rPr>
-                        <a:t>news_delete</a:t>
+                        <a:rPr sz="1200" b="0">
+                          <a:solidFill>
+                            <a:srgbClr val="000000"/>
+                          </a:solidFill>
+                          <a:latin typeface="Microsoft YaHei"/>
+                        </a:rPr>
+                        <a:t>删除后重定向</a:t>
                       </a:r>
                     </a:p>
                   </a:txBody>
@@ -14193,13 +14456,13 @@
                     <a:p>
                       <a:pPr algn="ctr"/>
                       <a:r>
-                        <a:rPr sz="1000" b="0">
-                          <a:solidFill>
-                            <a:srgbClr val="000000"/>
-                          </a:solidFill>
-                          <a:latin typeface="Microsoft YaHei"/>
-                        </a:rPr>
-                        <a:t>状态码与重定向</a:t>
+                        <a:rPr sz="1200" b="0">
+                          <a:solidFill>
+                            <a:srgbClr val="000000"/>
+                          </a:solidFill>
+                          <a:latin typeface="Microsoft YaHei"/>
+                        </a:rPr>
+                        <a:t>状态码与跳转</a:t>
                       </a:r>
                     </a:p>
                   </a:txBody>
@@ -14210,15 +14473,15 @@
                   </a:tcPr>
                 </a:tc>
               </a:tr>
-              <a:tr h="685800">
-                <a:tc>
-                  <a:txBody>
-                    <a:bodyPr/>
-                    <a:lstStyle/>
-                    <a:p>
-                      <a:pPr algn="ctr"/>
-                      <a:r>
-                        <a:rPr sz="1000" b="0">
+              <a:tr h="738051">
+                <a:tc>
+                  <a:txBody>
+                    <a:bodyPr/>
+                    <a:lstStyle/>
+                    <a:p>
+                      <a:pPr algn="ctr"/>
+                      <a:r>
+                        <a:rPr sz="1200" b="0">
                           <a:solidFill>
                             <a:srgbClr val="000000"/>
                           </a:solidFill>
@@ -14241,7 +14504,7 @@
                     <a:p>
                       <a:pPr algn="ctr"/>
                       <a:r>
-                        <a:rPr sz="1000" b="0">
+                        <a:rPr sz="1200" b="0">
                           <a:solidFill>
                             <a:srgbClr val="000000"/>
                           </a:solidFill>
@@ -14264,13 +14527,13 @@
                     <a:p>
                       <a:pPr algn="ctr"/>
                       <a:r>
-                        <a:rPr sz="1000" b="0">
-                          <a:solidFill>
-                            <a:srgbClr val="000000"/>
-                          </a:solidFill>
-                          <a:latin typeface="Microsoft YaHei"/>
-                        </a:rPr>
-                        <a:t>user_add/update/delete</a:t>
+                        <a:rPr sz="1200" b="0">
+                          <a:solidFill>
+                            <a:srgbClr val="000000"/>
+                          </a:solidFill>
+                          <a:latin typeface="Microsoft YaHei"/>
+                        </a:rPr>
+                        <a:t>重复账号与无效 ID</a:t>
                       </a:r>
                     </a:p>
                   </a:txBody>
@@ -14287,13 +14550,13 @@
                     <a:p>
                       <a:pPr algn="ctr"/>
                       <a:r>
-                        <a:rPr sz="1000" b="0">
-                          <a:solidFill>
-                            <a:srgbClr val="000000"/>
-                          </a:solidFill>
-                          <a:latin typeface="Microsoft YaHei"/>
-                        </a:rPr>
-                        <a:t>重复账号与无效 ID</a:t>
+                        <a:rPr sz="1200" b="0">
+                          <a:solidFill>
+                            <a:srgbClr val="000000"/>
+                          </a:solidFill>
+                          <a:latin typeface="Microsoft YaHei"/>
+                        </a:rPr>
+                        <a:t>重复值 + 边界值</a:t>
                       </a:r>
                     </a:p>
                   </a:txBody>
@@ -14304,15 +14567,15 @@
                   </a:tcPr>
                 </a:tc>
               </a:tr>
-              <a:tr h="685800">
-                <a:tc>
-                  <a:txBody>
-                    <a:bodyPr/>
-                    <a:lstStyle/>
-                    <a:p>
-                      <a:pPr algn="ctr"/>
-                      <a:r>
-                        <a:rPr sz="1000" b="0">
+              <a:tr h="738054">
+                <a:tc>
+                  <a:txBody>
+                    <a:bodyPr/>
+                    <a:lstStyle/>
+                    <a:p>
+                      <a:pPr algn="ctr"/>
+                      <a:r>
+                        <a:rPr sz="1200" b="0">
                           <a:solidFill>
                             <a:srgbClr val="000000"/>
                           </a:solidFill>
@@ -14335,7 +14598,7 @@
                     <a:p>
                       <a:pPr algn="ctr"/>
                       <a:r>
-                        <a:rPr sz="1000" b="0">
+                        <a:rPr sz="1200" b="0">
                           <a:solidFill>
                             <a:srgbClr val="000000"/>
                           </a:solidFill>
@@ -14358,13 +14621,13 @@
                     <a:p>
                       <a:pPr algn="ctr"/>
                       <a:r>
-                        <a:rPr sz="1000" b="0">
-                          <a:solidFill>
-                            <a:srgbClr val="000000"/>
-                          </a:solidFill>
-                          <a:latin typeface="Microsoft YaHei"/>
-                        </a:rPr>
-                        <a:t>redirect/view/model</a:t>
+                        <a:rPr sz="1200" b="0">
+                          <a:solidFill>
+                            <a:srgbClr val="000000"/>
+                          </a:solidFill>
+                          <a:latin typeface="Microsoft YaHei"/>
+                        </a:rPr>
+                        <a:t>视图、模型、重定向</a:t>
                       </a:r>
                     </a:p>
                   </a:txBody>
@@ -14381,7 +14644,7 @@
                     <a:p>
                       <a:pPr algn="ctr"/>
                       <a:r>
-                        <a:rPr sz="1000" b="0">
+                        <a:rPr sz="1200" b="0">
                           <a:solidFill>
                             <a:srgbClr val="000000"/>
                           </a:solidFill>
@@ -15327,7 +15590,7 @@
                 </a:solidFill>
                 <a:latin typeface="Microsoft YaHei"/>
               </a:rPr>
-              <a:t>• 测试入口：在 SoftwareTestingDemo/SoftwareTestingDemo 下执行 mvn test</a:t>
+              <a:t>• 测试入口：项目根目录执行 mvn test</a:t>
             </a:r>
           </a:p>
         </p:txBody>
